--- a/presentations/Передача пострадавшего бригаде СМП.pptx
+++ b/presentations/Передача пострадавшего бригаде СМП.pptx
@@ -14,6 +14,10 @@
     <p:sldId id="262" r:id="rId13"/>
     <p:sldId id="263" r:id="rId14"/>
     <p:sldId id="264" r:id="rId15"/>
+    <p:sldId id="265" r:id="rId16"/>
+    <p:sldId id="266" r:id="rId17"/>
+    <p:sldId id="267" r:id="rId18"/>
+    <p:sldId id="268" r:id="rId19"/>
   </p:sldIdLst>
   <p:sldSz cx="12191695" cy="6858000" type="screen4x3"/>
   <p:notesSz cx="6858000" cy="9144000"/>
@@ -3351,6 +3355,2409 @@
 </p:sld>
 </file>
 
+<file path=ppt/slides/slide10.xml><?xml version="1.0" encoding="utf-8"?>
+<p:sld xmlns:a="http://schemas.openxmlformats.org/drawingml/2006/main" xmlns:p="http://schemas.openxmlformats.org/presentationml/2006/main" xmlns:r="http://schemas.openxmlformats.org/officeDocument/2006/relationships">
+  <p:cSld>
+    <p:spTree>
+      <p:nvGrpSpPr>
+        <p:cNvPr id="1" name=""/>
+        <p:cNvGrpSpPr/>
+        <p:nvPr/>
+      </p:nvGrpSpPr>
+      <p:grpSpPr/>
+      <p:sp>
+        <p:nvSpPr>
+          <p:cNvPr id="2" name="Rectangle 1"/>
+          <p:cNvSpPr/>
+          <p:nvPr/>
+        </p:nvSpPr>
+        <p:spPr>
+          <a:xfrm>
+            <a:off x="0" y="0"/>
+            <a:ext cx="12191695" cy="6858000"/>
+          </a:xfrm>
+          <a:prstGeom prst="rect">
+            <a:avLst/>
+          </a:prstGeom>
+          <a:solidFill>
+            <a:srgbClr val="FFFFFF"/>
+          </a:solidFill>
+          <a:ln>
+            <a:noFill/>
+          </a:ln>
+        </p:spPr>
+        <p:style>
+          <a:lnRef idx="1">
+            <a:schemeClr val="accent1"/>
+          </a:lnRef>
+          <a:fillRef idx="3">
+            <a:schemeClr val="accent1"/>
+          </a:fillRef>
+          <a:effectRef idx="2">
+            <a:schemeClr val="accent1"/>
+          </a:effectRef>
+          <a:fontRef idx="minor">
+            <a:schemeClr val="lt1"/>
+          </a:fontRef>
+        </p:style>
+        <p:txBody>
+          <a:bodyPr rtlCol="0" anchor="ctr"/>
+          <a:lstStyle/>
+          <a:p>
+            <a:pPr algn="ctr"/>
+          </a:p>
+        </p:txBody>
+      </p:sp>
+      <p:sp>
+        <p:nvSpPr>
+          <p:cNvPr id="3" name="TextBox 2"/>
+          <p:cNvSpPr txBox="1"/>
+          <p:nvPr/>
+        </p:nvSpPr>
+        <p:spPr>
+          <a:xfrm>
+            <a:off x="700000" y="250000"/>
+            <a:ext cx="11200000" cy="550000"/>
+          </a:xfrm>
+          <a:prstGeom prst="rect">
+            <a:avLst/>
+          </a:prstGeom>
+          <a:noFill/>
+        </p:spPr>
+        <p:txBody>
+          <a:bodyPr wrap="square" anchor="t">
+            <a:spAutoFit/>
+          </a:bodyPr>
+          <a:lstStyle/>
+          <a:p>
+            <a:pPr algn="l"/>
+            <a:r>
+              <a:rPr sz="2200" b="1">
+                <a:solidFill>
+                  <a:srgbClr val="333333"/>
+                </a:solidFill>
+                <a:latin typeface="Open Sans"/>
+                <a:ea typeface="Open Sans"/>
+                <a:cs typeface="Open Sans"/>
+              </a:rPr>
+              <a:t>КАК ПОМОЧЬ БРИГАДЕ</a:t>
+            </a:r>
+          </a:p>
+        </p:txBody>
+      </p:sp>
+      <p:sp>
+        <p:nvSpPr>
+          <p:cNvPr id="4" name="Rectangle 3"/>
+          <p:cNvSpPr/>
+          <p:nvPr/>
+        </p:nvSpPr>
+        <p:spPr>
+          <a:xfrm>
+            <a:off x="700000" y="850000"/>
+            <a:ext cx="9000000" cy="28000"/>
+          </a:xfrm>
+          <a:prstGeom prst="rect">
+            <a:avLst/>
+          </a:prstGeom>
+          <a:solidFill>
+            <a:srgbClr val="555555"/>
+          </a:solidFill>
+          <a:ln>
+            <a:noFill/>
+          </a:ln>
+        </p:spPr>
+        <p:style>
+          <a:lnRef idx="1">
+            <a:schemeClr val="accent1"/>
+          </a:lnRef>
+          <a:fillRef idx="3">
+            <a:schemeClr val="accent1"/>
+          </a:fillRef>
+          <a:effectRef idx="2">
+            <a:schemeClr val="accent1"/>
+          </a:effectRef>
+          <a:fontRef idx="minor">
+            <a:schemeClr val="lt1"/>
+          </a:fontRef>
+        </p:style>
+        <p:txBody>
+          <a:bodyPr rtlCol="0" anchor="ctr"/>
+          <a:lstStyle/>
+          <a:p>
+            <a:pPr algn="ctr"/>
+          </a:p>
+        </p:txBody>
+      </p:sp>
+      <p:sp>
+        <p:nvSpPr>
+          <p:cNvPr id="5" name="TextBox 4"/>
+          <p:cNvSpPr txBox="1"/>
+          <p:nvPr/>
+        </p:nvSpPr>
+        <p:spPr>
+          <a:xfrm>
+            <a:off x="700000" y="920000"/>
+            <a:ext cx="11000000" cy="350000"/>
+          </a:xfrm>
+          <a:prstGeom prst="rect">
+            <a:avLst/>
+          </a:prstGeom>
+          <a:noFill/>
+        </p:spPr>
+        <p:txBody>
+          <a:bodyPr wrap="square" anchor="t">
+            <a:spAutoFit/>
+          </a:bodyPr>
+          <a:lstStyle/>
+          <a:p>
+            <a:pPr algn="l"/>
+            <a:r>
+              <a:rPr sz="1200" b="0">
+                <a:solidFill>
+                  <a:srgbClr val="666666"/>
+                </a:solidFill>
+                <a:latin typeface="Open Sans"/>
+                <a:ea typeface="Open Sans"/>
+                <a:cs typeface="Open Sans"/>
+              </a:rPr>
+              <a:t>Оказание первой помощи при травмах, ранениях и поражениях, прочих состояниях</a:t>
+            </a:r>
+          </a:p>
+        </p:txBody>
+      </p:sp>
+      <p:sp>
+        <p:nvSpPr>
+          <p:cNvPr id="6" name="Rectangle 5"/>
+          <p:cNvSpPr/>
+          <p:nvPr/>
+        </p:nvSpPr>
+        <p:spPr>
+          <a:xfrm>
+            <a:off x="0" y="2800000"/>
+            <a:ext cx="420000" cy="420000"/>
+          </a:xfrm>
+          <a:prstGeom prst="rect">
+            <a:avLst/>
+          </a:prstGeom>
+          <a:solidFill>
+            <a:srgbClr val="555555"/>
+          </a:solidFill>
+          <a:ln>
+            <a:noFill/>
+          </a:ln>
+        </p:spPr>
+        <p:style>
+          <a:lnRef idx="1">
+            <a:schemeClr val="accent1"/>
+          </a:lnRef>
+          <a:fillRef idx="3">
+            <a:schemeClr val="accent1"/>
+          </a:fillRef>
+          <a:effectRef idx="2">
+            <a:schemeClr val="accent1"/>
+          </a:effectRef>
+          <a:fontRef idx="minor">
+            <a:schemeClr val="lt1"/>
+          </a:fontRef>
+        </p:style>
+        <p:txBody>
+          <a:bodyPr rtlCol="0" anchor="ctr"/>
+          <a:lstStyle/>
+          <a:p>
+            <a:pPr algn="ctr"/>
+          </a:p>
+        </p:txBody>
+      </p:sp>
+      <p:sp>
+        <p:nvSpPr>
+          <p:cNvPr id="7" name="TextBox 6"/>
+          <p:cNvSpPr txBox="1"/>
+          <p:nvPr/>
+        </p:nvSpPr>
+        <p:spPr>
+          <a:xfrm>
+            <a:off x="0" y="2800000"/>
+            <a:ext cx="420000" cy="420000"/>
+          </a:xfrm>
+          <a:prstGeom prst="rect">
+            <a:avLst/>
+          </a:prstGeom>
+          <a:noFill/>
+        </p:spPr>
+        <p:txBody>
+          <a:bodyPr wrap="square" anchor="ctr">
+            <a:spAutoFit/>
+          </a:bodyPr>
+          <a:lstStyle/>
+          <a:p>
+            <a:pPr algn="ctr"/>
+            <a:r>
+              <a:rPr sz="1400" b="1">
+                <a:solidFill>
+                  <a:srgbClr val="FFFFFF"/>
+                </a:solidFill>
+                <a:latin typeface="Open Sans"/>
+                <a:ea typeface="Open Sans"/>
+                <a:cs typeface="Open Sans"/>
+              </a:rPr>
+              <a:t>10</a:t>
+            </a:r>
+          </a:p>
+        </p:txBody>
+      </p:sp>
+      <p:sp>
+        <p:nvSpPr>
+          <p:cNvPr id="8" name="Rectangle 7"/>
+          <p:cNvSpPr/>
+          <p:nvPr/>
+        </p:nvSpPr>
+        <p:spPr>
+          <a:xfrm>
+            <a:off x="700000" y="1400000"/>
+            <a:ext cx="5400000" cy="2420000"/>
+          </a:xfrm>
+          <a:prstGeom prst="rect">
+            <a:avLst/>
+          </a:prstGeom>
+          <a:solidFill>
+            <a:srgbClr val="FFFFFF"/>
+          </a:solidFill>
+          <a:ln w="12700">
+            <a:solidFill>
+              <a:srgbClr val="999999"/>
+            </a:solidFill>
+          </a:ln>
+        </p:spPr>
+        <p:style>
+          <a:lnRef idx="1">
+            <a:schemeClr val="accent1"/>
+          </a:lnRef>
+          <a:fillRef idx="3">
+            <a:schemeClr val="accent1"/>
+          </a:fillRef>
+          <a:effectRef idx="2">
+            <a:schemeClr val="accent1"/>
+          </a:effectRef>
+          <a:fontRef idx="minor">
+            <a:schemeClr val="lt1"/>
+          </a:fontRef>
+        </p:style>
+        <p:txBody>
+          <a:bodyPr rtlCol="0" anchor="ctr"/>
+          <a:lstStyle/>
+          <a:p>
+            <a:pPr algn="ctr"/>
+          </a:p>
+        </p:txBody>
+      </p:sp>
+      <p:sp>
+        <p:nvSpPr>
+          <p:cNvPr id="9" name="Oval 8"/>
+          <p:cNvSpPr/>
+          <p:nvPr/>
+        </p:nvSpPr>
+        <p:spPr>
+          <a:xfrm>
+            <a:off x="820000" y="1550000"/>
+            <a:ext cx="450000" cy="450000"/>
+          </a:xfrm>
+          <a:prstGeom prst="ellipse">
+            <a:avLst/>
+          </a:prstGeom>
+          <a:solidFill>
+            <a:srgbClr val="555555"/>
+          </a:solidFill>
+          <a:ln>
+            <a:noFill/>
+          </a:ln>
+        </p:spPr>
+        <p:style>
+          <a:lnRef idx="1">
+            <a:schemeClr val="accent1"/>
+          </a:lnRef>
+          <a:fillRef idx="3">
+            <a:schemeClr val="accent1"/>
+          </a:fillRef>
+          <a:effectRef idx="2">
+            <a:schemeClr val="accent1"/>
+          </a:effectRef>
+          <a:fontRef idx="minor">
+            <a:schemeClr val="lt1"/>
+          </a:fontRef>
+        </p:style>
+        <p:txBody>
+          <a:bodyPr rtlCol="0" anchor="ctr"/>
+          <a:lstStyle/>
+          <a:p>
+            <a:pPr algn="ctr"/>
+          </a:p>
+        </p:txBody>
+      </p:sp>
+      <p:sp>
+        <p:nvSpPr>
+          <p:cNvPr id="10" name="TextBox 9"/>
+          <p:cNvSpPr txBox="1"/>
+          <p:nvPr/>
+        </p:nvSpPr>
+        <p:spPr>
+          <a:xfrm>
+            <a:off x="820000" y="1550000"/>
+            <a:ext cx="450000" cy="450000"/>
+          </a:xfrm>
+          <a:prstGeom prst="rect">
+            <a:avLst/>
+          </a:prstGeom>
+          <a:noFill/>
+        </p:spPr>
+        <p:txBody>
+          <a:bodyPr wrap="square" anchor="ctr">
+            <a:spAutoFit/>
+          </a:bodyPr>
+          <a:lstStyle/>
+          <a:p>
+            <a:pPr algn="ctr"/>
+            <a:r>
+              <a:rPr sz="1300" b="1">
+                <a:solidFill>
+                  <a:srgbClr val="FFFFFF"/>
+                </a:solidFill>
+                <a:latin typeface="Open Sans"/>
+                <a:ea typeface="Open Sans"/>
+                <a:cs typeface="Open Sans"/>
+              </a:rPr>
+              <a:t>1</a:t>
+            </a:r>
+          </a:p>
+        </p:txBody>
+      </p:sp>
+      <p:sp>
+        <p:nvSpPr>
+          <p:cNvPr id="11" name="TextBox 10"/>
+          <p:cNvSpPr txBox="1"/>
+          <p:nvPr/>
+        </p:nvSpPr>
+        <p:spPr>
+          <a:xfrm>
+            <a:off x="1350000" y="1580000"/>
+            <a:ext cx="4600000" cy="400000"/>
+          </a:xfrm>
+          <a:prstGeom prst="rect">
+            <a:avLst/>
+          </a:prstGeom>
+          <a:noFill/>
+        </p:spPr>
+        <p:txBody>
+          <a:bodyPr wrap="square" anchor="t">
+            <a:spAutoFit/>
+          </a:bodyPr>
+          <a:lstStyle/>
+          <a:p>
+            <a:pPr algn="l"/>
+            <a:r>
+              <a:rPr sz="1200" b="1">
+                <a:solidFill>
+                  <a:srgbClr val="333333"/>
+                </a:solidFill>
+                <a:latin typeface="Open Sans"/>
+                <a:ea typeface="Open Sans"/>
+                <a:cs typeface="Open Sans"/>
+              </a:rPr>
+              <a:t>Освободить доступ</a:t>
+            </a:r>
+          </a:p>
+        </p:txBody>
+      </p:sp>
+      <p:sp>
+        <p:nvSpPr>
+          <p:cNvPr id="12" name="TextBox 11"/>
+          <p:cNvSpPr txBox="1"/>
+          <p:nvPr/>
+        </p:nvSpPr>
+        <p:spPr>
+          <a:xfrm>
+            <a:off x="820000" y="2100000"/>
+            <a:ext cx="5160000" cy="1570000"/>
+          </a:xfrm>
+          <a:prstGeom prst="rect">
+            <a:avLst/>
+          </a:prstGeom>
+          <a:noFill/>
+        </p:spPr>
+        <p:txBody>
+          <a:bodyPr wrap="square" anchor="t">
+            <a:spAutoFit/>
+          </a:bodyPr>
+          <a:lstStyle/>
+          <a:p>
+            <a:pPr algn="l"/>
+            <a:r>
+              <a:rPr sz="1200" b="0">
+                <a:solidFill>
+                  <a:srgbClr val="666666"/>
+                </a:solidFill>
+                <a:latin typeface="Open Sans"/>
+                <a:ea typeface="Open Sans"/>
+                <a:cs typeface="Open Sans"/>
+              </a:rPr>
+              <a:t>Уберите лишних людей, животных и предметы; обеспечьте освещение и безопасный путь.</a:t>
+            </a:r>
+          </a:p>
+        </p:txBody>
+      </p:sp>
+      <p:sp>
+        <p:nvSpPr>
+          <p:cNvPr id="13" name="Rectangle 12"/>
+          <p:cNvSpPr/>
+          <p:nvPr/>
+        </p:nvSpPr>
+        <p:spPr>
+          <a:xfrm>
+            <a:off x="6300000" y="1400000"/>
+            <a:ext cx="5400000" cy="2420000"/>
+          </a:xfrm>
+          <a:prstGeom prst="rect">
+            <a:avLst/>
+          </a:prstGeom>
+          <a:solidFill>
+            <a:srgbClr val="FFFFFF"/>
+          </a:solidFill>
+          <a:ln w="12700">
+            <a:solidFill>
+              <a:srgbClr val="999999"/>
+            </a:solidFill>
+          </a:ln>
+        </p:spPr>
+        <p:style>
+          <a:lnRef idx="1">
+            <a:schemeClr val="accent1"/>
+          </a:lnRef>
+          <a:fillRef idx="3">
+            <a:schemeClr val="accent1"/>
+          </a:fillRef>
+          <a:effectRef idx="2">
+            <a:schemeClr val="accent1"/>
+          </a:effectRef>
+          <a:fontRef idx="minor">
+            <a:schemeClr val="lt1"/>
+          </a:fontRef>
+        </p:style>
+        <p:txBody>
+          <a:bodyPr rtlCol="0" anchor="ctr"/>
+          <a:lstStyle/>
+          <a:p>
+            <a:pPr algn="ctr"/>
+          </a:p>
+        </p:txBody>
+      </p:sp>
+      <p:sp>
+        <p:nvSpPr>
+          <p:cNvPr id="14" name="Oval 13"/>
+          <p:cNvSpPr/>
+          <p:nvPr/>
+        </p:nvSpPr>
+        <p:spPr>
+          <a:xfrm>
+            <a:off x="6420000" y="1550000"/>
+            <a:ext cx="450000" cy="450000"/>
+          </a:xfrm>
+          <a:prstGeom prst="ellipse">
+            <a:avLst/>
+          </a:prstGeom>
+          <a:solidFill>
+            <a:srgbClr val="555555"/>
+          </a:solidFill>
+          <a:ln>
+            <a:noFill/>
+          </a:ln>
+        </p:spPr>
+        <p:style>
+          <a:lnRef idx="1">
+            <a:schemeClr val="accent1"/>
+          </a:lnRef>
+          <a:fillRef idx="3">
+            <a:schemeClr val="accent1"/>
+          </a:fillRef>
+          <a:effectRef idx="2">
+            <a:schemeClr val="accent1"/>
+          </a:effectRef>
+          <a:fontRef idx="minor">
+            <a:schemeClr val="lt1"/>
+          </a:fontRef>
+        </p:style>
+        <p:txBody>
+          <a:bodyPr rtlCol="0" anchor="ctr"/>
+          <a:lstStyle/>
+          <a:p>
+            <a:pPr algn="ctr"/>
+          </a:p>
+        </p:txBody>
+      </p:sp>
+      <p:sp>
+        <p:nvSpPr>
+          <p:cNvPr id="15" name="TextBox 14"/>
+          <p:cNvSpPr txBox="1"/>
+          <p:nvPr/>
+        </p:nvSpPr>
+        <p:spPr>
+          <a:xfrm>
+            <a:off x="6420000" y="1550000"/>
+            <a:ext cx="450000" cy="450000"/>
+          </a:xfrm>
+          <a:prstGeom prst="rect">
+            <a:avLst/>
+          </a:prstGeom>
+          <a:noFill/>
+        </p:spPr>
+        <p:txBody>
+          <a:bodyPr wrap="square" anchor="ctr">
+            <a:spAutoFit/>
+          </a:bodyPr>
+          <a:lstStyle/>
+          <a:p>
+            <a:pPr algn="ctr"/>
+            <a:r>
+              <a:rPr sz="1300" b="1">
+                <a:solidFill>
+                  <a:srgbClr val="FFFFFF"/>
+                </a:solidFill>
+                <a:latin typeface="Open Sans"/>
+                <a:ea typeface="Open Sans"/>
+                <a:cs typeface="Open Sans"/>
+              </a:rPr>
+              <a:t>2</a:t>
+            </a:r>
+          </a:p>
+        </p:txBody>
+      </p:sp>
+      <p:sp>
+        <p:nvSpPr>
+          <p:cNvPr id="16" name="TextBox 15"/>
+          <p:cNvSpPr txBox="1"/>
+          <p:nvPr/>
+        </p:nvSpPr>
+        <p:spPr>
+          <a:xfrm>
+            <a:off x="6950000" y="1580000"/>
+            <a:ext cx="4600000" cy="400000"/>
+          </a:xfrm>
+          <a:prstGeom prst="rect">
+            <a:avLst/>
+          </a:prstGeom>
+          <a:noFill/>
+        </p:spPr>
+        <p:txBody>
+          <a:bodyPr wrap="square" anchor="t">
+            <a:spAutoFit/>
+          </a:bodyPr>
+          <a:lstStyle/>
+          <a:p>
+            <a:pPr algn="l"/>
+            <a:r>
+              <a:rPr sz="1200" b="1">
+                <a:solidFill>
+                  <a:srgbClr val="333333"/>
+                </a:solidFill>
+                <a:latin typeface="Open Sans"/>
+                <a:ea typeface="Open Sans"/>
+                <a:cs typeface="Open Sans"/>
+              </a:rPr>
+              <a:t>Передать материалы</a:t>
+            </a:r>
+          </a:p>
+        </p:txBody>
+      </p:sp>
+      <p:sp>
+        <p:nvSpPr>
+          <p:cNvPr id="17" name="TextBox 16"/>
+          <p:cNvSpPr txBox="1"/>
+          <p:nvPr/>
+        </p:nvSpPr>
+        <p:spPr>
+          <a:xfrm>
+            <a:off x="6420000" y="2100000"/>
+            <a:ext cx="5160000" cy="1570000"/>
+          </a:xfrm>
+          <a:prstGeom prst="rect">
+            <a:avLst/>
+          </a:prstGeom>
+          <a:noFill/>
+        </p:spPr>
+        <p:txBody>
+          <a:bodyPr wrap="square" anchor="t">
+            <a:spAutoFit/>
+          </a:bodyPr>
+          <a:lstStyle/>
+          <a:p>
+            <a:pPr algn="l"/>
+            <a:r>
+              <a:rPr sz="1200" b="0">
+                <a:solidFill>
+                  <a:srgbClr val="666666"/>
+                </a:solidFill>
+                <a:latin typeface="Open Sans"/>
+                <a:ea typeface="Open Sans"/>
+                <a:cs typeface="Open Sans"/>
+              </a:rPr>
+              <a:t>Отдайте документы, упаковки веществ, лекарства и свои записи о времени.</a:t>
+            </a:r>
+          </a:p>
+        </p:txBody>
+      </p:sp>
+      <p:sp>
+        <p:nvSpPr>
+          <p:cNvPr id="18" name="Rectangle 17"/>
+          <p:cNvSpPr/>
+          <p:nvPr/>
+        </p:nvSpPr>
+        <p:spPr>
+          <a:xfrm>
+            <a:off x="700000" y="3980000"/>
+            <a:ext cx="5400000" cy="2420000"/>
+          </a:xfrm>
+          <a:prstGeom prst="rect">
+            <a:avLst/>
+          </a:prstGeom>
+          <a:solidFill>
+            <a:srgbClr val="FFFFFF"/>
+          </a:solidFill>
+          <a:ln w="12700">
+            <a:solidFill>
+              <a:srgbClr val="999999"/>
+            </a:solidFill>
+          </a:ln>
+        </p:spPr>
+        <p:style>
+          <a:lnRef idx="1">
+            <a:schemeClr val="accent1"/>
+          </a:lnRef>
+          <a:fillRef idx="3">
+            <a:schemeClr val="accent1"/>
+          </a:fillRef>
+          <a:effectRef idx="2">
+            <a:schemeClr val="accent1"/>
+          </a:effectRef>
+          <a:fontRef idx="minor">
+            <a:schemeClr val="lt1"/>
+          </a:fontRef>
+        </p:style>
+        <p:txBody>
+          <a:bodyPr rtlCol="0" anchor="ctr"/>
+          <a:lstStyle/>
+          <a:p>
+            <a:pPr algn="ctr"/>
+          </a:p>
+        </p:txBody>
+      </p:sp>
+      <p:sp>
+        <p:nvSpPr>
+          <p:cNvPr id="19" name="Oval 18"/>
+          <p:cNvSpPr/>
+          <p:nvPr/>
+        </p:nvSpPr>
+        <p:spPr>
+          <a:xfrm>
+            <a:off x="820000" y="4130000"/>
+            <a:ext cx="450000" cy="450000"/>
+          </a:xfrm>
+          <a:prstGeom prst="ellipse">
+            <a:avLst/>
+          </a:prstGeom>
+          <a:solidFill>
+            <a:srgbClr val="555555"/>
+          </a:solidFill>
+          <a:ln>
+            <a:noFill/>
+          </a:ln>
+        </p:spPr>
+        <p:style>
+          <a:lnRef idx="1">
+            <a:schemeClr val="accent1"/>
+          </a:lnRef>
+          <a:fillRef idx="3">
+            <a:schemeClr val="accent1"/>
+          </a:fillRef>
+          <a:effectRef idx="2">
+            <a:schemeClr val="accent1"/>
+          </a:effectRef>
+          <a:fontRef idx="minor">
+            <a:schemeClr val="lt1"/>
+          </a:fontRef>
+        </p:style>
+        <p:txBody>
+          <a:bodyPr rtlCol="0" anchor="ctr"/>
+          <a:lstStyle/>
+          <a:p>
+            <a:pPr algn="ctr"/>
+          </a:p>
+        </p:txBody>
+      </p:sp>
+      <p:sp>
+        <p:nvSpPr>
+          <p:cNvPr id="20" name="TextBox 19"/>
+          <p:cNvSpPr txBox="1"/>
+          <p:nvPr/>
+        </p:nvSpPr>
+        <p:spPr>
+          <a:xfrm>
+            <a:off x="820000" y="4130000"/>
+            <a:ext cx="450000" cy="450000"/>
+          </a:xfrm>
+          <a:prstGeom prst="rect">
+            <a:avLst/>
+          </a:prstGeom>
+          <a:noFill/>
+        </p:spPr>
+        <p:txBody>
+          <a:bodyPr wrap="square" anchor="ctr">
+            <a:spAutoFit/>
+          </a:bodyPr>
+          <a:lstStyle/>
+          <a:p>
+            <a:pPr algn="ctr"/>
+            <a:r>
+              <a:rPr sz="1300" b="1">
+                <a:solidFill>
+                  <a:srgbClr val="FFFFFF"/>
+                </a:solidFill>
+                <a:latin typeface="Open Sans"/>
+                <a:ea typeface="Open Sans"/>
+                <a:cs typeface="Open Sans"/>
+              </a:rPr>
+              <a:t>3</a:t>
+            </a:r>
+          </a:p>
+        </p:txBody>
+      </p:sp>
+      <p:sp>
+        <p:nvSpPr>
+          <p:cNvPr id="21" name="TextBox 20"/>
+          <p:cNvSpPr txBox="1"/>
+          <p:nvPr/>
+        </p:nvSpPr>
+        <p:spPr>
+          <a:xfrm>
+            <a:off x="1350000" y="4160000"/>
+            <a:ext cx="4600000" cy="400000"/>
+          </a:xfrm>
+          <a:prstGeom prst="rect">
+            <a:avLst/>
+          </a:prstGeom>
+          <a:noFill/>
+        </p:spPr>
+        <p:txBody>
+          <a:bodyPr wrap="square" anchor="t">
+            <a:spAutoFit/>
+          </a:bodyPr>
+          <a:lstStyle/>
+          <a:p>
+            <a:pPr algn="l"/>
+            <a:r>
+              <a:rPr sz="1200" b="1">
+                <a:solidFill>
+                  <a:srgbClr val="333333"/>
+                </a:solidFill>
+                <a:latin typeface="Open Sans"/>
+                <a:ea typeface="Open Sans"/>
+                <a:cs typeface="Open Sans"/>
+              </a:rPr>
+              <a:t>Помочь перенести</a:t>
+            </a:r>
+          </a:p>
+        </p:txBody>
+      </p:sp>
+      <p:sp>
+        <p:nvSpPr>
+          <p:cNvPr id="22" name="TextBox 21"/>
+          <p:cNvSpPr txBox="1"/>
+          <p:nvPr/>
+        </p:nvSpPr>
+        <p:spPr>
+          <a:xfrm>
+            <a:off x="820000" y="4680000"/>
+            <a:ext cx="5160000" cy="1570000"/>
+          </a:xfrm>
+          <a:prstGeom prst="rect">
+            <a:avLst/>
+          </a:prstGeom>
+          <a:noFill/>
+        </p:spPr>
+        <p:txBody>
+          <a:bodyPr wrap="square" anchor="t">
+            <a:spAutoFit/>
+          </a:bodyPr>
+          <a:lstStyle/>
+          <a:p>
+            <a:pPr algn="l"/>
+            <a:r>
+              <a:rPr sz="1200" b="0">
+                <a:solidFill>
+                  <a:srgbClr val="666666"/>
+                </a:solidFill>
+                <a:latin typeface="Open Sans"/>
+                <a:ea typeface="Open Sans"/>
+                <a:cs typeface="Open Sans"/>
+              </a:rPr>
+              <a:t>Участвуйте в подъеме и переносе только по просьбе, выполняя команды одного руководителя.</a:t>
+            </a:r>
+          </a:p>
+        </p:txBody>
+      </p:sp>
+      <p:sp>
+        <p:nvSpPr>
+          <p:cNvPr id="23" name="Rectangle 22"/>
+          <p:cNvSpPr/>
+          <p:nvPr/>
+        </p:nvSpPr>
+        <p:spPr>
+          <a:xfrm>
+            <a:off x="6300000" y="3980000"/>
+            <a:ext cx="5400000" cy="2420000"/>
+          </a:xfrm>
+          <a:prstGeom prst="rect">
+            <a:avLst/>
+          </a:prstGeom>
+          <a:solidFill>
+            <a:srgbClr val="FFFFFF"/>
+          </a:solidFill>
+          <a:ln w="12700">
+            <a:solidFill>
+              <a:srgbClr val="999999"/>
+            </a:solidFill>
+          </a:ln>
+        </p:spPr>
+        <p:style>
+          <a:lnRef idx="1">
+            <a:schemeClr val="accent1"/>
+          </a:lnRef>
+          <a:fillRef idx="3">
+            <a:schemeClr val="accent1"/>
+          </a:fillRef>
+          <a:effectRef idx="2">
+            <a:schemeClr val="accent1"/>
+          </a:effectRef>
+          <a:fontRef idx="minor">
+            <a:schemeClr val="lt1"/>
+          </a:fontRef>
+        </p:style>
+        <p:txBody>
+          <a:bodyPr rtlCol="0" anchor="ctr"/>
+          <a:lstStyle/>
+          <a:p>
+            <a:pPr algn="ctr"/>
+          </a:p>
+        </p:txBody>
+      </p:sp>
+      <p:sp>
+        <p:nvSpPr>
+          <p:cNvPr id="24" name="Oval 23"/>
+          <p:cNvSpPr/>
+          <p:nvPr/>
+        </p:nvSpPr>
+        <p:spPr>
+          <a:xfrm>
+            <a:off x="6420000" y="4130000"/>
+            <a:ext cx="450000" cy="450000"/>
+          </a:xfrm>
+          <a:prstGeom prst="ellipse">
+            <a:avLst/>
+          </a:prstGeom>
+          <a:solidFill>
+            <a:srgbClr val="555555"/>
+          </a:solidFill>
+          <a:ln>
+            <a:noFill/>
+          </a:ln>
+        </p:spPr>
+        <p:style>
+          <a:lnRef idx="1">
+            <a:schemeClr val="accent1"/>
+          </a:lnRef>
+          <a:fillRef idx="3">
+            <a:schemeClr val="accent1"/>
+          </a:fillRef>
+          <a:effectRef idx="2">
+            <a:schemeClr val="accent1"/>
+          </a:effectRef>
+          <a:fontRef idx="minor">
+            <a:schemeClr val="lt1"/>
+          </a:fontRef>
+        </p:style>
+        <p:txBody>
+          <a:bodyPr rtlCol="0" anchor="ctr"/>
+          <a:lstStyle/>
+          <a:p>
+            <a:pPr algn="ctr"/>
+          </a:p>
+        </p:txBody>
+      </p:sp>
+      <p:sp>
+        <p:nvSpPr>
+          <p:cNvPr id="25" name="TextBox 24"/>
+          <p:cNvSpPr txBox="1"/>
+          <p:nvPr/>
+        </p:nvSpPr>
+        <p:spPr>
+          <a:xfrm>
+            <a:off x="6420000" y="4130000"/>
+            <a:ext cx="450000" cy="450000"/>
+          </a:xfrm>
+          <a:prstGeom prst="rect">
+            <a:avLst/>
+          </a:prstGeom>
+          <a:noFill/>
+        </p:spPr>
+        <p:txBody>
+          <a:bodyPr wrap="square" anchor="ctr">
+            <a:spAutoFit/>
+          </a:bodyPr>
+          <a:lstStyle/>
+          <a:p>
+            <a:pPr algn="ctr"/>
+            <a:r>
+              <a:rPr sz="1300" b="1">
+                <a:solidFill>
+                  <a:srgbClr val="FFFFFF"/>
+                </a:solidFill>
+                <a:latin typeface="Open Sans"/>
+                <a:ea typeface="Open Sans"/>
+                <a:cs typeface="Open Sans"/>
+              </a:rPr>
+              <a:t>4</a:t>
+            </a:r>
+          </a:p>
+        </p:txBody>
+      </p:sp>
+      <p:sp>
+        <p:nvSpPr>
+          <p:cNvPr id="26" name="TextBox 25"/>
+          <p:cNvSpPr txBox="1"/>
+          <p:nvPr/>
+        </p:nvSpPr>
+        <p:spPr>
+          <a:xfrm>
+            <a:off x="6950000" y="4160000"/>
+            <a:ext cx="4600000" cy="400000"/>
+          </a:xfrm>
+          <a:prstGeom prst="rect">
+            <a:avLst/>
+          </a:prstGeom>
+          <a:noFill/>
+        </p:spPr>
+        <p:txBody>
+          <a:bodyPr wrap="square" anchor="t">
+            <a:spAutoFit/>
+          </a:bodyPr>
+          <a:lstStyle/>
+          <a:p>
+            <a:pPr algn="l"/>
+            <a:r>
+              <a:rPr sz="1200" b="1">
+                <a:solidFill>
+                  <a:srgbClr val="333333"/>
+                </a:solidFill>
+                <a:latin typeface="Open Sans"/>
+                <a:ea typeface="Open Sans"/>
+                <a:cs typeface="Open Sans"/>
+              </a:rPr>
+              <a:t>Не мешать</a:t>
+            </a:r>
+          </a:p>
+        </p:txBody>
+      </p:sp>
+      <p:sp>
+        <p:nvSpPr>
+          <p:cNvPr id="27" name="TextBox 26"/>
+          <p:cNvSpPr txBox="1"/>
+          <p:nvPr/>
+        </p:nvSpPr>
+        <p:spPr>
+          <a:xfrm>
+            <a:off x="6420000" y="4680000"/>
+            <a:ext cx="5160000" cy="1570000"/>
+          </a:xfrm>
+          <a:prstGeom prst="rect">
+            <a:avLst/>
+          </a:prstGeom>
+          <a:noFill/>
+        </p:spPr>
+        <p:txBody>
+          <a:bodyPr wrap="square" anchor="t">
+            <a:spAutoFit/>
+          </a:bodyPr>
+          <a:lstStyle/>
+          <a:p>
+            <a:pPr algn="l"/>
+            <a:r>
+              <a:rPr sz="1200" b="0">
+                <a:solidFill>
+                  <a:srgbClr val="666666"/>
+                </a:solidFill>
+                <a:latin typeface="Open Sans"/>
+                <a:ea typeface="Open Sans"/>
+                <a:cs typeface="Open Sans"/>
+              </a:rPr>
+              <a:t>После передачи отойдите на указанное место, но оставайтесь доступным для вопросов.</a:t>
+            </a:r>
+          </a:p>
+        </p:txBody>
+      </p:sp>
+    </p:spTree>
+  </p:cSld>
+  <p:clrMapOvr>
+    <a:masterClrMapping/>
+  </p:clrMapOvr>
+</p:sld>
+</file>
+
+<file path=ppt/slides/slide11.xml><?xml version="1.0" encoding="utf-8"?>
+<p:sld xmlns:a="http://schemas.openxmlformats.org/drawingml/2006/main" xmlns:p="http://schemas.openxmlformats.org/presentationml/2006/main" xmlns:r="http://schemas.openxmlformats.org/officeDocument/2006/relationships">
+  <p:cSld>
+    <p:spTree>
+      <p:nvGrpSpPr>
+        <p:cNvPr id="1" name=""/>
+        <p:cNvGrpSpPr/>
+        <p:nvPr/>
+      </p:nvGrpSpPr>
+      <p:grpSpPr/>
+      <p:sp>
+        <p:nvSpPr>
+          <p:cNvPr id="2" name="Rectangle 1"/>
+          <p:cNvSpPr/>
+          <p:nvPr/>
+        </p:nvSpPr>
+        <p:spPr>
+          <a:xfrm>
+            <a:off x="0" y="0"/>
+            <a:ext cx="12191695" cy="6858000"/>
+          </a:xfrm>
+          <a:prstGeom prst="rect">
+            <a:avLst/>
+          </a:prstGeom>
+          <a:solidFill>
+            <a:srgbClr val="FFFFFF"/>
+          </a:solidFill>
+          <a:ln>
+            <a:noFill/>
+          </a:ln>
+        </p:spPr>
+        <p:style>
+          <a:lnRef idx="1">
+            <a:schemeClr val="accent1"/>
+          </a:lnRef>
+          <a:fillRef idx="3">
+            <a:schemeClr val="accent1"/>
+          </a:fillRef>
+          <a:effectRef idx="2">
+            <a:schemeClr val="accent1"/>
+          </a:effectRef>
+          <a:fontRef idx="minor">
+            <a:schemeClr val="lt1"/>
+          </a:fontRef>
+        </p:style>
+        <p:txBody>
+          <a:bodyPr rtlCol="0" anchor="ctr"/>
+          <a:lstStyle/>
+          <a:p>
+            <a:pPr algn="ctr"/>
+          </a:p>
+        </p:txBody>
+      </p:sp>
+      <p:sp>
+        <p:nvSpPr>
+          <p:cNvPr id="3" name="TextBox 2"/>
+          <p:cNvSpPr txBox="1"/>
+          <p:nvPr/>
+        </p:nvSpPr>
+        <p:spPr>
+          <a:xfrm>
+            <a:off x="700000" y="250000"/>
+            <a:ext cx="11200000" cy="550000"/>
+          </a:xfrm>
+          <a:prstGeom prst="rect">
+            <a:avLst/>
+          </a:prstGeom>
+          <a:noFill/>
+        </p:spPr>
+        <p:txBody>
+          <a:bodyPr wrap="square" anchor="t">
+            <a:spAutoFit/>
+          </a:bodyPr>
+          <a:lstStyle/>
+          <a:p>
+            <a:pPr algn="l"/>
+            <a:r>
+              <a:rPr sz="2200" b="1">
+                <a:solidFill>
+                  <a:srgbClr val="333333"/>
+                </a:solidFill>
+                <a:latin typeface="Open Sans"/>
+                <a:ea typeface="Open Sans"/>
+                <a:cs typeface="Open Sans"/>
+              </a:rPr>
+              <a:t>ГЛАВНОЕ ЗАПОМНИТЬ</a:t>
+            </a:r>
+          </a:p>
+        </p:txBody>
+      </p:sp>
+      <p:sp>
+        <p:nvSpPr>
+          <p:cNvPr id="4" name="Rectangle 3"/>
+          <p:cNvSpPr/>
+          <p:nvPr/>
+        </p:nvSpPr>
+        <p:spPr>
+          <a:xfrm>
+            <a:off x="700000" y="850000"/>
+            <a:ext cx="9000000" cy="28000"/>
+          </a:xfrm>
+          <a:prstGeom prst="rect">
+            <a:avLst/>
+          </a:prstGeom>
+          <a:solidFill>
+            <a:srgbClr val="555555"/>
+          </a:solidFill>
+          <a:ln>
+            <a:noFill/>
+          </a:ln>
+        </p:spPr>
+        <p:style>
+          <a:lnRef idx="1">
+            <a:schemeClr val="accent1"/>
+          </a:lnRef>
+          <a:fillRef idx="3">
+            <a:schemeClr val="accent1"/>
+          </a:fillRef>
+          <a:effectRef idx="2">
+            <a:schemeClr val="accent1"/>
+          </a:effectRef>
+          <a:fontRef idx="minor">
+            <a:schemeClr val="lt1"/>
+          </a:fontRef>
+        </p:style>
+        <p:txBody>
+          <a:bodyPr rtlCol="0" anchor="ctr"/>
+          <a:lstStyle/>
+          <a:p>
+            <a:pPr algn="ctr"/>
+          </a:p>
+        </p:txBody>
+      </p:sp>
+      <p:sp>
+        <p:nvSpPr>
+          <p:cNvPr id="5" name="TextBox 4"/>
+          <p:cNvSpPr txBox="1"/>
+          <p:nvPr/>
+        </p:nvSpPr>
+        <p:spPr>
+          <a:xfrm>
+            <a:off x="700000" y="920000"/>
+            <a:ext cx="11000000" cy="350000"/>
+          </a:xfrm>
+          <a:prstGeom prst="rect">
+            <a:avLst/>
+          </a:prstGeom>
+          <a:noFill/>
+        </p:spPr>
+        <p:txBody>
+          <a:bodyPr wrap="square" anchor="t">
+            <a:spAutoFit/>
+          </a:bodyPr>
+          <a:lstStyle/>
+          <a:p>
+            <a:pPr algn="l"/>
+            <a:r>
+              <a:rPr sz="1200" b="0">
+                <a:solidFill>
+                  <a:srgbClr val="666666"/>
+                </a:solidFill>
+                <a:latin typeface="Open Sans"/>
+                <a:ea typeface="Open Sans"/>
+                <a:cs typeface="Open Sans"/>
+              </a:rPr>
+              <a:t>Оказание первой помощи при травмах, ранениях и поражениях, прочих состояниях</a:t>
+            </a:r>
+          </a:p>
+        </p:txBody>
+      </p:sp>
+      <p:sp>
+        <p:nvSpPr>
+          <p:cNvPr id="6" name="Rectangle 5"/>
+          <p:cNvSpPr/>
+          <p:nvPr/>
+        </p:nvSpPr>
+        <p:spPr>
+          <a:xfrm>
+            <a:off x="0" y="2800000"/>
+            <a:ext cx="420000" cy="420000"/>
+          </a:xfrm>
+          <a:prstGeom prst="rect">
+            <a:avLst/>
+          </a:prstGeom>
+          <a:solidFill>
+            <a:srgbClr val="555555"/>
+          </a:solidFill>
+          <a:ln>
+            <a:noFill/>
+          </a:ln>
+        </p:spPr>
+        <p:style>
+          <a:lnRef idx="1">
+            <a:schemeClr val="accent1"/>
+          </a:lnRef>
+          <a:fillRef idx="3">
+            <a:schemeClr val="accent1"/>
+          </a:fillRef>
+          <a:effectRef idx="2">
+            <a:schemeClr val="accent1"/>
+          </a:effectRef>
+          <a:fontRef idx="minor">
+            <a:schemeClr val="lt1"/>
+          </a:fontRef>
+        </p:style>
+        <p:txBody>
+          <a:bodyPr rtlCol="0" anchor="ctr"/>
+          <a:lstStyle/>
+          <a:p>
+            <a:pPr algn="ctr"/>
+          </a:p>
+        </p:txBody>
+      </p:sp>
+      <p:sp>
+        <p:nvSpPr>
+          <p:cNvPr id="7" name="TextBox 6"/>
+          <p:cNvSpPr txBox="1"/>
+          <p:nvPr/>
+        </p:nvSpPr>
+        <p:spPr>
+          <a:xfrm>
+            <a:off x="0" y="2800000"/>
+            <a:ext cx="420000" cy="420000"/>
+          </a:xfrm>
+          <a:prstGeom prst="rect">
+            <a:avLst/>
+          </a:prstGeom>
+          <a:noFill/>
+        </p:spPr>
+        <p:txBody>
+          <a:bodyPr wrap="square" anchor="ctr">
+            <a:spAutoFit/>
+          </a:bodyPr>
+          <a:lstStyle/>
+          <a:p>
+            <a:pPr algn="ctr"/>
+            <a:r>
+              <a:rPr sz="1400" b="1">
+                <a:solidFill>
+                  <a:srgbClr val="FFFFFF"/>
+                </a:solidFill>
+                <a:latin typeface="Open Sans"/>
+                <a:ea typeface="Open Sans"/>
+                <a:cs typeface="Open Sans"/>
+              </a:rPr>
+              <a:t>11</a:t>
+            </a:r>
+          </a:p>
+        </p:txBody>
+      </p:sp>
+      <p:sp>
+        <p:nvSpPr>
+          <p:cNvPr id="8" name="Rectangle 7"/>
+          <p:cNvSpPr/>
+          <p:nvPr/>
+        </p:nvSpPr>
+        <p:spPr>
+          <a:xfrm>
+            <a:off x="700000" y="1450000"/>
+            <a:ext cx="11000000" cy="850000"/>
+          </a:xfrm>
+          <a:prstGeom prst="rect">
+            <a:avLst/>
+          </a:prstGeom>
+          <a:solidFill>
+            <a:srgbClr val="FFFFFF"/>
+          </a:solidFill>
+          <a:ln w="12700">
+            <a:solidFill>
+              <a:srgbClr val="999999"/>
+            </a:solidFill>
+          </a:ln>
+        </p:spPr>
+        <p:style>
+          <a:lnRef idx="1">
+            <a:schemeClr val="accent1"/>
+          </a:lnRef>
+          <a:fillRef idx="3">
+            <a:schemeClr val="accent1"/>
+          </a:fillRef>
+          <a:effectRef idx="2">
+            <a:schemeClr val="accent1"/>
+          </a:effectRef>
+          <a:fontRef idx="minor">
+            <a:schemeClr val="lt1"/>
+          </a:fontRef>
+        </p:style>
+        <p:txBody>
+          <a:bodyPr rtlCol="0" anchor="ctr"/>
+          <a:lstStyle/>
+          <a:p>
+            <a:pPr algn="ctr"/>
+          </a:p>
+        </p:txBody>
+      </p:sp>
+      <p:sp>
+        <p:nvSpPr>
+          <p:cNvPr id="9" name="Rectangle 8"/>
+          <p:cNvSpPr/>
+          <p:nvPr/>
+        </p:nvSpPr>
+        <p:spPr>
+          <a:xfrm>
+            <a:off x="700000" y="1450000"/>
+            <a:ext cx="90000" cy="850000"/>
+          </a:xfrm>
+          <a:prstGeom prst="rect">
+            <a:avLst/>
+          </a:prstGeom>
+          <a:solidFill>
+            <a:srgbClr val="CC0000"/>
+          </a:solidFill>
+          <a:ln>
+            <a:noFill/>
+          </a:ln>
+        </p:spPr>
+        <p:style>
+          <a:lnRef idx="1">
+            <a:schemeClr val="accent1"/>
+          </a:lnRef>
+          <a:fillRef idx="3">
+            <a:schemeClr val="accent1"/>
+          </a:fillRef>
+          <a:effectRef idx="2">
+            <a:schemeClr val="accent1"/>
+          </a:effectRef>
+          <a:fontRef idx="minor">
+            <a:schemeClr val="lt1"/>
+          </a:fontRef>
+        </p:style>
+        <p:txBody>
+          <a:bodyPr rtlCol="0" anchor="ctr"/>
+          <a:lstStyle/>
+          <a:p>
+            <a:pPr algn="ctr"/>
+          </a:p>
+        </p:txBody>
+      </p:sp>
+      <p:sp>
+        <p:nvSpPr>
+          <p:cNvPr id="10" name="TextBox 9"/>
+          <p:cNvSpPr txBox="1"/>
+          <p:nvPr/>
+        </p:nvSpPr>
+        <p:spPr>
+          <a:xfrm>
+            <a:off x="1000000" y="1530000"/>
+            <a:ext cx="10400000" cy="690000"/>
+          </a:xfrm>
+          <a:prstGeom prst="rect">
+            <a:avLst/>
+          </a:prstGeom>
+          <a:noFill/>
+        </p:spPr>
+        <p:txBody>
+          <a:bodyPr wrap="square" anchor="ctr">
+            <a:spAutoFit/>
+          </a:bodyPr>
+          <a:lstStyle/>
+          <a:p>
+            <a:pPr algn="l"/>
+            <a:r>
+              <a:rPr sz="1300" b="0">
+                <a:solidFill>
+                  <a:srgbClr val="333333"/>
+                </a:solidFill>
+                <a:latin typeface="Open Sans"/>
+                <a:ea typeface="Open Sans"/>
+                <a:cs typeface="Open Sans"/>
+              </a:rPr>
+              <a:t>Продолжайте помощь до распоряжения медицинского работника</a:t>
+            </a:r>
+          </a:p>
+        </p:txBody>
+      </p:sp>
+      <p:sp>
+        <p:nvSpPr>
+          <p:cNvPr id="11" name="Rectangle 10"/>
+          <p:cNvSpPr/>
+          <p:nvPr/>
+        </p:nvSpPr>
+        <p:spPr>
+          <a:xfrm>
+            <a:off x="700000" y="2380000"/>
+            <a:ext cx="11000000" cy="850000"/>
+          </a:xfrm>
+          <a:prstGeom prst="rect">
+            <a:avLst/>
+          </a:prstGeom>
+          <a:solidFill>
+            <a:srgbClr val="FFFFFF"/>
+          </a:solidFill>
+          <a:ln w="12700">
+            <a:solidFill>
+              <a:srgbClr val="999999"/>
+            </a:solidFill>
+          </a:ln>
+        </p:spPr>
+        <p:style>
+          <a:lnRef idx="1">
+            <a:schemeClr val="accent1"/>
+          </a:lnRef>
+          <a:fillRef idx="3">
+            <a:schemeClr val="accent1"/>
+          </a:fillRef>
+          <a:effectRef idx="2">
+            <a:schemeClr val="accent1"/>
+          </a:effectRef>
+          <a:fontRef idx="minor">
+            <a:schemeClr val="lt1"/>
+          </a:fontRef>
+        </p:style>
+        <p:txBody>
+          <a:bodyPr rtlCol="0" anchor="ctr"/>
+          <a:lstStyle/>
+          <a:p>
+            <a:pPr algn="ctr"/>
+          </a:p>
+        </p:txBody>
+      </p:sp>
+      <p:sp>
+        <p:nvSpPr>
+          <p:cNvPr id="12" name="Rectangle 11"/>
+          <p:cNvSpPr/>
+          <p:nvPr/>
+        </p:nvSpPr>
+        <p:spPr>
+          <a:xfrm>
+            <a:off x="700000" y="2380000"/>
+            <a:ext cx="90000" cy="850000"/>
+          </a:xfrm>
+          <a:prstGeom prst="rect">
+            <a:avLst/>
+          </a:prstGeom>
+          <a:solidFill>
+            <a:srgbClr val="CC0000"/>
+          </a:solidFill>
+          <a:ln>
+            <a:noFill/>
+          </a:ln>
+        </p:spPr>
+        <p:style>
+          <a:lnRef idx="1">
+            <a:schemeClr val="accent1"/>
+          </a:lnRef>
+          <a:fillRef idx="3">
+            <a:schemeClr val="accent1"/>
+          </a:fillRef>
+          <a:effectRef idx="2">
+            <a:schemeClr val="accent1"/>
+          </a:effectRef>
+          <a:fontRef idx="minor">
+            <a:schemeClr val="lt1"/>
+          </a:fontRef>
+        </p:style>
+        <p:txBody>
+          <a:bodyPr rtlCol="0" anchor="ctr"/>
+          <a:lstStyle/>
+          <a:p>
+            <a:pPr algn="ctr"/>
+          </a:p>
+        </p:txBody>
+      </p:sp>
+      <p:sp>
+        <p:nvSpPr>
+          <p:cNvPr id="13" name="TextBox 12"/>
+          <p:cNvSpPr txBox="1"/>
+          <p:nvPr/>
+        </p:nvSpPr>
+        <p:spPr>
+          <a:xfrm>
+            <a:off x="1000000" y="2460000"/>
+            <a:ext cx="10400000" cy="690000"/>
+          </a:xfrm>
+          <a:prstGeom prst="rect">
+            <a:avLst/>
+          </a:prstGeom>
+          <a:noFill/>
+        </p:spPr>
+        <p:txBody>
+          <a:bodyPr wrap="square" anchor="ctr">
+            <a:spAutoFit/>
+          </a:bodyPr>
+          <a:lstStyle/>
+          <a:p>
+            <a:pPr algn="l"/>
+            <a:r>
+              <a:rPr sz="1300" b="0">
+                <a:solidFill>
+                  <a:srgbClr val="333333"/>
+                </a:solidFill>
+                <a:latin typeface="Open Sans"/>
+                <a:ea typeface="Open Sans"/>
+                <a:cs typeface="Open Sans"/>
+              </a:rPr>
+              <a:t>Кратко сообщите, что, где и когда произошло</a:t>
+            </a:r>
+          </a:p>
+        </p:txBody>
+      </p:sp>
+      <p:sp>
+        <p:nvSpPr>
+          <p:cNvPr id="14" name="Rectangle 13"/>
+          <p:cNvSpPr/>
+          <p:nvPr/>
+        </p:nvSpPr>
+        <p:spPr>
+          <a:xfrm>
+            <a:off x="700000" y="3310000"/>
+            <a:ext cx="11000000" cy="850000"/>
+          </a:xfrm>
+          <a:prstGeom prst="rect">
+            <a:avLst/>
+          </a:prstGeom>
+          <a:solidFill>
+            <a:srgbClr val="FFFFFF"/>
+          </a:solidFill>
+          <a:ln w="12700">
+            <a:solidFill>
+              <a:srgbClr val="999999"/>
+            </a:solidFill>
+          </a:ln>
+        </p:spPr>
+        <p:style>
+          <a:lnRef idx="1">
+            <a:schemeClr val="accent1"/>
+          </a:lnRef>
+          <a:fillRef idx="3">
+            <a:schemeClr val="accent1"/>
+          </a:fillRef>
+          <a:effectRef idx="2">
+            <a:schemeClr val="accent1"/>
+          </a:effectRef>
+          <a:fontRef idx="minor">
+            <a:schemeClr val="lt1"/>
+          </a:fontRef>
+        </p:style>
+        <p:txBody>
+          <a:bodyPr rtlCol="0" anchor="ctr"/>
+          <a:lstStyle/>
+          <a:p>
+            <a:pPr algn="ctr"/>
+          </a:p>
+        </p:txBody>
+      </p:sp>
+      <p:sp>
+        <p:nvSpPr>
+          <p:cNvPr id="15" name="Rectangle 14"/>
+          <p:cNvSpPr/>
+          <p:nvPr/>
+        </p:nvSpPr>
+        <p:spPr>
+          <a:xfrm>
+            <a:off x="700000" y="3310000"/>
+            <a:ext cx="90000" cy="850000"/>
+          </a:xfrm>
+          <a:prstGeom prst="rect">
+            <a:avLst/>
+          </a:prstGeom>
+          <a:solidFill>
+            <a:srgbClr val="CC0000"/>
+          </a:solidFill>
+          <a:ln>
+            <a:noFill/>
+          </a:ln>
+        </p:spPr>
+        <p:style>
+          <a:lnRef idx="1">
+            <a:schemeClr val="accent1"/>
+          </a:lnRef>
+          <a:fillRef idx="3">
+            <a:schemeClr val="accent1"/>
+          </a:fillRef>
+          <a:effectRef idx="2">
+            <a:schemeClr val="accent1"/>
+          </a:effectRef>
+          <a:fontRef idx="minor">
+            <a:schemeClr val="lt1"/>
+          </a:fontRef>
+        </p:style>
+        <p:txBody>
+          <a:bodyPr rtlCol="0" anchor="ctr"/>
+          <a:lstStyle/>
+          <a:p>
+            <a:pPr algn="ctr"/>
+          </a:p>
+        </p:txBody>
+      </p:sp>
+      <p:sp>
+        <p:nvSpPr>
+          <p:cNvPr id="16" name="TextBox 15"/>
+          <p:cNvSpPr txBox="1"/>
+          <p:nvPr/>
+        </p:nvSpPr>
+        <p:spPr>
+          <a:xfrm>
+            <a:off x="1000000" y="3390000"/>
+            <a:ext cx="10400000" cy="690000"/>
+          </a:xfrm>
+          <a:prstGeom prst="rect">
+            <a:avLst/>
+          </a:prstGeom>
+          <a:noFill/>
+        </p:spPr>
+        <p:txBody>
+          <a:bodyPr wrap="square" anchor="ctr">
+            <a:spAutoFit/>
+          </a:bodyPr>
+          <a:lstStyle/>
+          <a:p>
+            <a:pPr algn="l"/>
+            <a:r>
+              <a:rPr sz="1300" b="0">
+                <a:solidFill>
+                  <a:srgbClr val="333333"/>
+                </a:solidFill>
+                <a:latin typeface="Open Sans"/>
+                <a:ea typeface="Open Sans"/>
+                <a:cs typeface="Open Sans"/>
+              </a:rPr>
+              <a:t>Опишите исходное состояние, травмы и жалобы</a:t>
+            </a:r>
+          </a:p>
+        </p:txBody>
+      </p:sp>
+      <p:sp>
+        <p:nvSpPr>
+          <p:cNvPr id="17" name="Rectangle 16"/>
+          <p:cNvSpPr/>
+          <p:nvPr/>
+        </p:nvSpPr>
+        <p:spPr>
+          <a:xfrm>
+            <a:off x="700000" y="4240000"/>
+            <a:ext cx="11000000" cy="850000"/>
+          </a:xfrm>
+          <a:prstGeom prst="rect">
+            <a:avLst/>
+          </a:prstGeom>
+          <a:solidFill>
+            <a:srgbClr val="FFFFFF"/>
+          </a:solidFill>
+          <a:ln w="12700">
+            <a:solidFill>
+              <a:srgbClr val="999999"/>
+            </a:solidFill>
+          </a:ln>
+        </p:spPr>
+        <p:style>
+          <a:lnRef idx="1">
+            <a:schemeClr val="accent1"/>
+          </a:lnRef>
+          <a:fillRef idx="3">
+            <a:schemeClr val="accent1"/>
+          </a:fillRef>
+          <a:effectRef idx="2">
+            <a:schemeClr val="accent1"/>
+          </a:effectRef>
+          <a:fontRef idx="minor">
+            <a:schemeClr val="lt1"/>
+          </a:fontRef>
+        </p:style>
+        <p:txBody>
+          <a:bodyPr rtlCol="0" anchor="ctr"/>
+          <a:lstStyle/>
+          <a:p>
+            <a:pPr algn="ctr"/>
+          </a:p>
+        </p:txBody>
+      </p:sp>
+      <p:sp>
+        <p:nvSpPr>
+          <p:cNvPr id="18" name="Rectangle 17"/>
+          <p:cNvSpPr/>
+          <p:nvPr/>
+        </p:nvSpPr>
+        <p:spPr>
+          <a:xfrm>
+            <a:off x="700000" y="4240000"/>
+            <a:ext cx="90000" cy="850000"/>
+          </a:xfrm>
+          <a:prstGeom prst="rect">
+            <a:avLst/>
+          </a:prstGeom>
+          <a:solidFill>
+            <a:srgbClr val="CC0000"/>
+          </a:solidFill>
+          <a:ln>
+            <a:noFill/>
+          </a:ln>
+        </p:spPr>
+        <p:style>
+          <a:lnRef idx="1">
+            <a:schemeClr val="accent1"/>
+          </a:lnRef>
+          <a:fillRef idx="3">
+            <a:schemeClr val="accent1"/>
+          </a:fillRef>
+          <a:effectRef idx="2">
+            <a:schemeClr val="accent1"/>
+          </a:effectRef>
+          <a:fontRef idx="minor">
+            <a:schemeClr val="lt1"/>
+          </a:fontRef>
+        </p:style>
+        <p:txBody>
+          <a:bodyPr rtlCol="0" anchor="ctr"/>
+          <a:lstStyle/>
+          <a:p>
+            <a:pPr algn="ctr"/>
+          </a:p>
+        </p:txBody>
+      </p:sp>
+      <p:sp>
+        <p:nvSpPr>
+          <p:cNvPr id="19" name="TextBox 18"/>
+          <p:cNvSpPr txBox="1"/>
+          <p:nvPr/>
+        </p:nvSpPr>
+        <p:spPr>
+          <a:xfrm>
+            <a:off x="1000000" y="4320000"/>
+            <a:ext cx="10400000" cy="690000"/>
+          </a:xfrm>
+          <a:prstGeom prst="rect">
+            <a:avLst/>
+          </a:prstGeom>
+          <a:noFill/>
+        </p:spPr>
+        <p:txBody>
+          <a:bodyPr wrap="square" anchor="ctr">
+            <a:spAutoFit/>
+          </a:bodyPr>
+          <a:lstStyle/>
+          <a:p>
+            <a:pPr algn="l"/>
+            <a:r>
+              <a:rPr sz="1300" b="0">
+                <a:solidFill>
+                  <a:srgbClr val="333333"/>
+                </a:solidFill>
+                <a:latin typeface="Open Sans"/>
+                <a:ea typeface="Open Sans"/>
+                <a:cs typeface="Open Sans"/>
+              </a:rPr>
+              <a:t>Перечислите действия, время и изменения состояния</a:t>
+            </a:r>
+          </a:p>
+        </p:txBody>
+      </p:sp>
+      <p:sp>
+        <p:nvSpPr>
+          <p:cNvPr id="20" name="Rectangle 19"/>
+          <p:cNvSpPr/>
+          <p:nvPr/>
+        </p:nvSpPr>
+        <p:spPr>
+          <a:xfrm>
+            <a:off x="700000" y="5170000"/>
+            <a:ext cx="11000000" cy="850000"/>
+          </a:xfrm>
+          <a:prstGeom prst="rect">
+            <a:avLst/>
+          </a:prstGeom>
+          <a:solidFill>
+            <a:srgbClr val="FFFFFF"/>
+          </a:solidFill>
+          <a:ln w="12700">
+            <a:solidFill>
+              <a:srgbClr val="999999"/>
+            </a:solidFill>
+          </a:ln>
+        </p:spPr>
+        <p:style>
+          <a:lnRef idx="1">
+            <a:schemeClr val="accent1"/>
+          </a:lnRef>
+          <a:fillRef idx="3">
+            <a:schemeClr val="accent1"/>
+          </a:fillRef>
+          <a:effectRef idx="2">
+            <a:schemeClr val="accent1"/>
+          </a:effectRef>
+          <a:fontRef idx="minor">
+            <a:schemeClr val="lt1"/>
+          </a:fontRef>
+        </p:style>
+        <p:txBody>
+          <a:bodyPr rtlCol="0" anchor="ctr"/>
+          <a:lstStyle/>
+          <a:p>
+            <a:pPr algn="ctr"/>
+          </a:p>
+        </p:txBody>
+      </p:sp>
+      <p:sp>
+        <p:nvSpPr>
+          <p:cNvPr id="21" name="Rectangle 20"/>
+          <p:cNvSpPr/>
+          <p:nvPr/>
+        </p:nvSpPr>
+        <p:spPr>
+          <a:xfrm>
+            <a:off x="700000" y="5170000"/>
+            <a:ext cx="90000" cy="850000"/>
+          </a:xfrm>
+          <a:prstGeom prst="rect">
+            <a:avLst/>
+          </a:prstGeom>
+          <a:solidFill>
+            <a:srgbClr val="CC0000"/>
+          </a:solidFill>
+          <a:ln>
+            <a:noFill/>
+          </a:ln>
+        </p:spPr>
+        <p:style>
+          <a:lnRef idx="1">
+            <a:schemeClr val="accent1"/>
+          </a:lnRef>
+          <a:fillRef idx="3">
+            <a:schemeClr val="accent1"/>
+          </a:fillRef>
+          <a:effectRef idx="2">
+            <a:schemeClr val="accent1"/>
+          </a:effectRef>
+          <a:fontRef idx="minor">
+            <a:schemeClr val="lt1"/>
+          </a:fontRef>
+        </p:style>
+        <p:txBody>
+          <a:bodyPr rtlCol="0" anchor="ctr"/>
+          <a:lstStyle/>
+          <a:p>
+            <a:pPr algn="ctr"/>
+          </a:p>
+        </p:txBody>
+      </p:sp>
+      <p:sp>
+        <p:nvSpPr>
+          <p:cNvPr id="22" name="TextBox 21"/>
+          <p:cNvSpPr txBox="1"/>
+          <p:nvPr/>
+        </p:nvSpPr>
+        <p:spPr>
+          <a:xfrm>
+            <a:off x="1000000" y="5250000"/>
+            <a:ext cx="10400000" cy="690000"/>
+          </a:xfrm>
+          <a:prstGeom prst="rect">
+            <a:avLst/>
+          </a:prstGeom>
+          <a:noFill/>
+        </p:spPr>
+        <p:txBody>
+          <a:bodyPr wrap="square" anchor="ctr">
+            <a:spAutoFit/>
+          </a:bodyPr>
+          <a:lstStyle/>
+          <a:p>
+            <a:pPr algn="l"/>
+            <a:r>
+              <a:rPr sz="1300" b="0">
+                <a:solidFill>
+                  <a:srgbClr val="333333"/>
+                </a:solidFill>
+                <a:latin typeface="Open Sans"/>
+                <a:ea typeface="Open Sans"/>
+                <a:cs typeface="Open Sans"/>
+              </a:rPr>
+              <a:t>Помогайте бригаде только по ее просьбе и командам</a:t>
+            </a:r>
+          </a:p>
+        </p:txBody>
+      </p:sp>
+    </p:spTree>
+  </p:cSld>
+  <p:clrMapOvr>
+    <a:masterClrMapping/>
+  </p:clrMapOvr>
+</p:sld>
+</file>
+
+<file path=ppt/slides/slide12.xml><?xml version="1.0" encoding="utf-8"?>
+<p:sld xmlns:a="http://schemas.openxmlformats.org/drawingml/2006/main" xmlns:p="http://schemas.openxmlformats.org/presentationml/2006/main" xmlns:r="http://schemas.openxmlformats.org/officeDocument/2006/relationships">
+  <p:cSld>
+    <p:spTree>
+      <p:nvGrpSpPr>
+        <p:cNvPr id="1" name=""/>
+        <p:cNvGrpSpPr/>
+        <p:nvPr/>
+      </p:nvGrpSpPr>
+      <p:grpSpPr/>
+      <p:sp>
+        <p:nvSpPr>
+          <p:cNvPr id="2" name="Rectangle 1"/>
+          <p:cNvSpPr/>
+          <p:nvPr/>
+        </p:nvSpPr>
+        <p:spPr>
+          <a:xfrm>
+            <a:off x="0" y="0"/>
+            <a:ext cx="12191695" cy="6858000"/>
+          </a:xfrm>
+          <a:prstGeom prst="rect">
+            <a:avLst/>
+          </a:prstGeom>
+          <a:solidFill>
+            <a:srgbClr val="FFFFFF"/>
+          </a:solidFill>
+          <a:ln>
+            <a:noFill/>
+          </a:ln>
+        </p:spPr>
+        <p:style>
+          <a:lnRef idx="1">
+            <a:schemeClr val="accent1"/>
+          </a:lnRef>
+          <a:fillRef idx="3">
+            <a:schemeClr val="accent1"/>
+          </a:fillRef>
+          <a:effectRef idx="2">
+            <a:schemeClr val="accent1"/>
+          </a:effectRef>
+          <a:fontRef idx="minor">
+            <a:schemeClr val="lt1"/>
+          </a:fontRef>
+        </p:style>
+        <p:txBody>
+          <a:bodyPr rtlCol="0" anchor="ctr"/>
+          <a:lstStyle/>
+          <a:p>
+            <a:pPr algn="ctr"/>
+          </a:p>
+        </p:txBody>
+      </p:sp>
+      <p:sp>
+        <p:nvSpPr>
+          <p:cNvPr id="3" name="TextBox 2"/>
+          <p:cNvSpPr txBox="1"/>
+          <p:nvPr/>
+        </p:nvSpPr>
+        <p:spPr>
+          <a:xfrm>
+            <a:off x="700000" y="250000"/>
+            <a:ext cx="11200000" cy="550000"/>
+          </a:xfrm>
+          <a:prstGeom prst="rect">
+            <a:avLst/>
+          </a:prstGeom>
+          <a:noFill/>
+        </p:spPr>
+        <p:txBody>
+          <a:bodyPr wrap="square" anchor="t">
+            <a:spAutoFit/>
+          </a:bodyPr>
+          <a:lstStyle/>
+          <a:p>
+            <a:pPr algn="l"/>
+            <a:r>
+              <a:rPr sz="2200" b="1">
+                <a:solidFill>
+                  <a:srgbClr val="333333"/>
+                </a:solidFill>
+                <a:latin typeface="Open Sans"/>
+                <a:ea typeface="Open Sans"/>
+                <a:cs typeface="Open Sans"/>
+              </a:rPr>
+              <a:t>ПАМЯТКА</a:t>
+            </a:r>
+          </a:p>
+        </p:txBody>
+      </p:sp>
+      <p:sp>
+        <p:nvSpPr>
+          <p:cNvPr id="4" name="Rectangle 3"/>
+          <p:cNvSpPr/>
+          <p:nvPr/>
+        </p:nvSpPr>
+        <p:spPr>
+          <a:xfrm>
+            <a:off x="700000" y="850000"/>
+            <a:ext cx="9000000" cy="28000"/>
+          </a:xfrm>
+          <a:prstGeom prst="rect">
+            <a:avLst/>
+          </a:prstGeom>
+          <a:solidFill>
+            <a:srgbClr val="555555"/>
+          </a:solidFill>
+          <a:ln>
+            <a:noFill/>
+          </a:ln>
+        </p:spPr>
+        <p:style>
+          <a:lnRef idx="1">
+            <a:schemeClr val="accent1"/>
+          </a:lnRef>
+          <a:fillRef idx="3">
+            <a:schemeClr val="accent1"/>
+          </a:fillRef>
+          <a:effectRef idx="2">
+            <a:schemeClr val="accent1"/>
+          </a:effectRef>
+          <a:fontRef idx="minor">
+            <a:schemeClr val="lt1"/>
+          </a:fontRef>
+        </p:style>
+        <p:txBody>
+          <a:bodyPr rtlCol="0" anchor="ctr"/>
+          <a:lstStyle/>
+          <a:p>
+            <a:pPr algn="ctr"/>
+          </a:p>
+        </p:txBody>
+      </p:sp>
+      <p:sp>
+        <p:nvSpPr>
+          <p:cNvPr id="5" name="TextBox 4"/>
+          <p:cNvSpPr txBox="1"/>
+          <p:nvPr/>
+        </p:nvSpPr>
+        <p:spPr>
+          <a:xfrm>
+            <a:off x="700000" y="920000"/>
+            <a:ext cx="11000000" cy="350000"/>
+          </a:xfrm>
+          <a:prstGeom prst="rect">
+            <a:avLst/>
+          </a:prstGeom>
+          <a:noFill/>
+        </p:spPr>
+        <p:txBody>
+          <a:bodyPr wrap="square" anchor="t">
+            <a:spAutoFit/>
+          </a:bodyPr>
+          <a:lstStyle/>
+          <a:p>
+            <a:pPr algn="l"/>
+            <a:r>
+              <a:rPr sz="1200" b="0">
+                <a:solidFill>
+                  <a:srgbClr val="666666"/>
+                </a:solidFill>
+                <a:latin typeface="Open Sans"/>
+                <a:ea typeface="Open Sans"/>
+                <a:cs typeface="Open Sans"/>
+              </a:rPr>
+              <a:t>Оказание первой помощи при травмах, ранениях и поражениях, прочих состояниях</a:t>
+            </a:r>
+          </a:p>
+        </p:txBody>
+      </p:sp>
+      <p:sp>
+        <p:nvSpPr>
+          <p:cNvPr id="6" name="Rectangle 5"/>
+          <p:cNvSpPr/>
+          <p:nvPr/>
+        </p:nvSpPr>
+        <p:spPr>
+          <a:xfrm>
+            <a:off x="0" y="2800000"/>
+            <a:ext cx="420000" cy="420000"/>
+          </a:xfrm>
+          <a:prstGeom prst="rect">
+            <a:avLst/>
+          </a:prstGeom>
+          <a:solidFill>
+            <a:srgbClr val="555555"/>
+          </a:solidFill>
+          <a:ln>
+            <a:noFill/>
+          </a:ln>
+        </p:spPr>
+        <p:style>
+          <a:lnRef idx="1">
+            <a:schemeClr val="accent1"/>
+          </a:lnRef>
+          <a:fillRef idx="3">
+            <a:schemeClr val="accent1"/>
+          </a:fillRef>
+          <a:effectRef idx="2">
+            <a:schemeClr val="accent1"/>
+          </a:effectRef>
+          <a:fontRef idx="minor">
+            <a:schemeClr val="lt1"/>
+          </a:fontRef>
+        </p:style>
+        <p:txBody>
+          <a:bodyPr rtlCol="0" anchor="ctr"/>
+          <a:lstStyle/>
+          <a:p>
+            <a:pPr algn="ctr"/>
+          </a:p>
+        </p:txBody>
+      </p:sp>
+      <p:sp>
+        <p:nvSpPr>
+          <p:cNvPr id="7" name="TextBox 6"/>
+          <p:cNvSpPr txBox="1"/>
+          <p:nvPr/>
+        </p:nvSpPr>
+        <p:spPr>
+          <a:xfrm>
+            <a:off x="0" y="2800000"/>
+            <a:ext cx="420000" cy="420000"/>
+          </a:xfrm>
+          <a:prstGeom prst="rect">
+            <a:avLst/>
+          </a:prstGeom>
+          <a:noFill/>
+        </p:spPr>
+        <p:txBody>
+          <a:bodyPr wrap="square" anchor="ctr">
+            <a:spAutoFit/>
+          </a:bodyPr>
+          <a:lstStyle/>
+          <a:p>
+            <a:pPr algn="ctr"/>
+            <a:r>
+              <a:rPr sz="1400" b="1">
+                <a:solidFill>
+                  <a:srgbClr val="FFFFFF"/>
+                </a:solidFill>
+                <a:latin typeface="Open Sans"/>
+                <a:ea typeface="Open Sans"/>
+                <a:cs typeface="Open Sans"/>
+              </a:rPr>
+              <a:t>12</a:t>
+            </a:r>
+          </a:p>
+        </p:txBody>
+      </p:sp>
+      <p:pic>
+        <p:nvPicPr>
+          <p:cNvPr id="8" name="Picture 7" descr="pamyatka-tema4-peredacha-smp-16x9.png"/>
+          <p:cNvPicPr>
+            <a:picLocks noChangeAspect="1"/>
+          </p:cNvPicPr>
+          <p:nvPr/>
+        </p:nvPicPr>
+        <p:blipFill>
+          <a:blip r:embed="rId2"/>
+          <a:stretch>
+            <a:fillRect/>
+          </a:stretch>
+        </p:blipFill>
+        <p:spPr>
+          <a:xfrm>
+            <a:off x="2300000" y="1400000"/>
+            <a:ext cx="7800000" cy="5200000"/>
+          </a:xfrm>
+          <a:prstGeom prst="rect">
+            <a:avLst/>
+          </a:prstGeom>
+        </p:spPr>
+      </p:pic>
+    </p:spTree>
+  </p:cSld>
+  <p:clrMapOvr>
+    <a:masterClrMapping/>
+  </p:clrMapOvr>
+</p:sld>
+</file>
+
+<file path=ppt/slides/slide13.xml><?xml version="1.0" encoding="utf-8"?>
+<p:sld xmlns:a="http://schemas.openxmlformats.org/drawingml/2006/main" xmlns:p="http://schemas.openxmlformats.org/presentationml/2006/main" xmlns:r="http://schemas.openxmlformats.org/officeDocument/2006/relationships">
+  <p:cSld>
+    <p:spTree>
+      <p:nvGrpSpPr>
+        <p:cNvPr id="1" name=""/>
+        <p:cNvGrpSpPr/>
+        <p:nvPr/>
+      </p:nvGrpSpPr>
+      <p:grpSpPr/>
+      <p:sp>
+        <p:nvSpPr>
+          <p:cNvPr id="2" name="Rectangle 1"/>
+          <p:cNvSpPr/>
+          <p:nvPr/>
+        </p:nvSpPr>
+        <p:spPr>
+          <a:xfrm>
+            <a:off x="0" y="0"/>
+            <a:ext cx="3400000" cy="6858000"/>
+          </a:xfrm>
+          <a:prstGeom prst="rect">
+            <a:avLst/>
+          </a:prstGeom>
+          <a:solidFill>
+            <a:srgbClr val="DDDDDD"/>
+          </a:solidFill>
+          <a:ln>
+            <a:noFill/>
+          </a:ln>
+        </p:spPr>
+        <p:style>
+          <a:lnRef idx="1">
+            <a:schemeClr val="accent1"/>
+          </a:lnRef>
+          <a:fillRef idx="3">
+            <a:schemeClr val="accent1"/>
+          </a:fillRef>
+          <a:effectRef idx="2">
+            <a:schemeClr val="accent1"/>
+          </a:effectRef>
+          <a:fontRef idx="minor">
+            <a:schemeClr val="lt1"/>
+          </a:fontRef>
+        </p:style>
+        <p:txBody>
+          <a:bodyPr rtlCol="0" anchor="ctr"/>
+          <a:lstStyle/>
+          <a:p>
+            <a:pPr algn="ctr"/>
+          </a:p>
+        </p:txBody>
+      </p:sp>
+      <p:sp>
+        <p:nvSpPr>
+          <p:cNvPr id="3" name="Rectangle 2"/>
+          <p:cNvSpPr/>
+          <p:nvPr/>
+        </p:nvSpPr>
+        <p:spPr>
+          <a:xfrm>
+            <a:off x="3400000" y="0"/>
+            <a:ext cx="8800000" cy="6858000"/>
+          </a:xfrm>
+          <a:prstGeom prst="rect">
+            <a:avLst/>
+          </a:prstGeom>
+          <a:solidFill>
+            <a:srgbClr val="F8F8F8"/>
+          </a:solidFill>
+          <a:ln>
+            <a:noFill/>
+          </a:ln>
+        </p:spPr>
+        <p:style>
+          <a:lnRef idx="1">
+            <a:schemeClr val="accent1"/>
+          </a:lnRef>
+          <a:fillRef idx="3">
+            <a:schemeClr val="accent1"/>
+          </a:fillRef>
+          <a:effectRef idx="2">
+            <a:schemeClr val="accent1"/>
+          </a:effectRef>
+          <a:fontRef idx="minor">
+            <a:schemeClr val="lt1"/>
+          </a:fontRef>
+        </p:style>
+        <p:txBody>
+          <a:bodyPr rtlCol="0" anchor="ctr"/>
+          <a:lstStyle/>
+          <a:p>
+            <a:pPr algn="ctr"/>
+          </a:p>
+        </p:txBody>
+      </p:sp>
+      <p:sp>
+        <p:nvSpPr>
+          <p:cNvPr id="4" name="TextBox 3"/>
+          <p:cNvSpPr txBox="1"/>
+          <p:nvPr/>
+        </p:nvSpPr>
+        <p:spPr>
+          <a:xfrm>
+            <a:off x="4000000" y="3000000"/>
+            <a:ext cx="7500000" cy="1000000"/>
+          </a:xfrm>
+          <a:prstGeom prst="rect">
+            <a:avLst/>
+          </a:prstGeom>
+          <a:noFill/>
+        </p:spPr>
+        <p:txBody>
+          <a:bodyPr wrap="square" anchor="ctr">
+            <a:spAutoFit/>
+          </a:bodyPr>
+          <a:lstStyle/>
+          <a:p>
+            <a:pPr algn="l"/>
+            <a:r>
+              <a:rPr sz="3000" b="1">
+                <a:solidFill>
+                  <a:srgbClr val="333333"/>
+                </a:solidFill>
+                <a:latin typeface="Open Sans"/>
+                <a:ea typeface="Open Sans"/>
+                <a:cs typeface="Open Sans"/>
+              </a:rPr>
+              <a:t>БЛАГОДАРИМ ЗА ВНИМАНИЕ</a:t>
+            </a:r>
+          </a:p>
+        </p:txBody>
+      </p:sp>
+      <p:sp>
+        <p:nvSpPr>
+          <p:cNvPr id="5" name="Rectangle 4"/>
+          <p:cNvSpPr/>
+          <p:nvPr/>
+        </p:nvSpPr>
+        <p:spPr>
+          <a:xfrm>
+            <a:off x="4000000" y="4100000"/>
+            <a:ext cx="4500000" cy="30000"/>
+          </a:xfrm>
+          <a:prstGeom prst="rect">
+            <a:avLst/>
+          </a:prstGeom>
+          <a:solidFill>
+            <a:srgbClr val="333333"/>
+          </a:solidFill>
+          <a:ln>
+            <a:noFill/>
+          </a:ln>
+        </p:spPr>
+        <p:style>
+          <a:lnRef idx="1">
+            <a:schemeClr val="accent1"/>
+          </a:lnRef>
+          <a:fillRef idx="3">
+            <a:schemeClr val="accent1"/>
+          </a:fillRef>
+          <a:effectRef idx="2">
+            <a:schemeClr val="accent1"/>
+          </a:effectRef>
+          <a:fontRef idx="minor">
+            <a:schemeClr val="lt1"/>
+          </a:fontRef>
+        </p:style>
+        <p:txBody>
+          <a:bodyPr rtlCol="0" anchor="ctr"/>
+          <a:lstStyle/>
+          <a:p>
+            <a:pPr algn="ctr"/>
+          </a:p>
+        </p:txBody>
+      </p:sp>
+    </p:spTree>
+  </p:cSld>
+  <p:clrMapOvr>
+    <a:masterClrMapping/>
+  </p:clrMapOvr>
+</p:sld>
+</file>
+
 <file path=ppt/slides/slide2.xml><?xml version="1.0" encoding="utf-8"?>
 <p:sld xmlns:a="http://schemas.openxmlformats.org/drawingml/2006/main" xmlns:p="http://schemas.openxmlformats.org/presentationml/2006/main" xmlns:r="http://schemas.openxmlformats.org/officeDocument/2006/relationships">
   <p:cSld>
@@ -3920,7 +6327,7 @@
                 <a:ea typeface="Open Sans"/>
                 <a:cs typeface="Open Sans"/>
               </a:rPr>
-              <a:t>Краткий доклад</a:t>
+              <a:t>Структура доклада</a:t>
             </a:r>
           </a:p>
         </p:txBody>
@@ -4082,7 +6489,7 @@
                 <a:ea typeface="Open Sans"/>
                 <a:cs typeface="Open Sans"/>
               </a:rPr>
-              <a:t>Ответы на вопросы</a:t>
+              <a:t>Изменения состояния</a:t>
             </a:r>
           </a:p>
         </p:txBody>
@@ -4221,6 +6628,168 @@
         <p:spPr>
           <a:xfrm>
             <a:off x="1600000" y="4100000"/>
+            <a:ext cx="9600000" cy="520000"/>
+          </a:xfrm>
+          <a:prstGeom prst="rect">
+            <a:avLst/>
+          </a:prstGeom>
+          <a:noFill/>
+        </p:spPr>
+        <p:txBody>
+          <a:bodyPr wrap="square" anchor="ctr">
+            <a:spAutoFit/>
+          </a:bodyPr>
+          <a:lstStyle/>
+          <a:p>
+            <a:pPr algn="l"/>
+            <a:r>
+              <a:rPr sz="1500" b="0">
+                <a:solidFill>
+                  <a:srgbClr val="333333"/>
+                </a:solidFill>
+                <a:latin typeface="Open Sans"/>
+                <a:ea typeface="Open Sans"/>
+                <a:cs typeface="Open Sans"/>
+              </a:rPr>
+              <a:t>Ответы на вопросы</a:t>
+            </a:r>
+          </a:p>
+        </p:txBody>
+      </p:sp>
+      <p:sp>
+        <p:nvSpPr>
+          <p:cNvPr id="24" name="Oval 23"/>
+          <p:cNvSpPr/>
+          <p:nvPr/>
+        </p:nvSpPr>
+        <p:spPr>
+          <a:xfrm>
+            <a:off x="700000" y="4950000"/>
+            <a:ext cx="520000" cy="520000"/>
+          </a:xfrm>
+          <a:prstGeom prst="ellipse">
+            <a:avLst/>
+          </a:prstGeom>
+          <a:solidFill>
+            <a:srgbClr val="555555"/>
+          </a:solidFill>
+          <a:ln>
+            <a:noFill/>
+          </a:ln>
+        </p:spPr>
+        <p:style>
+          <a:lnRef idx="1">
+            <a:schemeClr val="accent1"/>
+          </a:lnRef>
+          <a:fillRef idx="3">
+            <a:schemeClr val="accent1"/>
+          </a:fillRef>
+          <a:effectRef idx="2">
+            <a:schemeClr val="accent1"/>
+          </a:effectRef>
+          <a:fontRef idx="minor">
+            <a:schemeClr val="lt1"/>
+          </a:fontRef>
+        </p:style>
+        <p:txBody>
+          <a:bodyPr rtlCol="0" anchor="ctr"/>
+          <a:lstStyle/>
+          <a:p>
+            <a:pPr algn="ctr"/>
+          </a:p>
+        </p:txBody>
+      </p:sp>
+      <p:sp>
+        <p:nvSpPr>
+          <p:cNvPr id="25" name="TextBox 24"/>
+          <p:cNvSpPr txBox="1"/>
+          <p:nvPr/>
+        </p:nvSpPr>
+        <p:spPr>
+          <a:xfrm>
+            <a:off x="700000" y="4950000"/>
+            <a:ext cx="520000" cy="520000"/>
+          </a:xfrm>
+          <a:prstGeom prst="rect">
+            <a:avLst/>
+          </a:prstGeom>
+          <a:noFill/>
+        </p:spPr>
+        <p:txBody>
+          <a:bodyPr wrap="square" anchor="ctr">
+            <a:spAutoFit/>
+          </a:bodyPr>
+          <a:lstStyle/>
+          <a:p>
+            <a:pPr algn="ctr"/>
+            <a:r>
+              <a:rPr sz="1500" b="1">
+                <a:solidFill>
+                  <a:srgbClr val="FFFFFF"/>
+                </a:solidFill>
+                <a:latin typeface="Open Sans"/>
+                <a:ea typeface="Open Sans"/>
+                <a:cs typeface="Open Sans"/>
+              </a:rPr>
+              <a:t>5</a:t>
+            </a:r>
+          </a:p>
+        </p:txBody>
+      </p:sp>
+      <p:sp>
+        <p:nvSpPr>
+          <p:cNvPr id="26" name="Rectangle 25"/>
+          <p:cNvSpPr/>
+          <p:nvPr/>
+        </p:nvSpPr>
+        <p:spPr>
+          <a:xfrm>
+            <a:off x="1400000" y="4950000"/>
+            <a:ext cx="10000000" cy="520000"/>
+          </a:xfrm>
+          <a:prstGeom prst="rect">
+            <a:avLst/>
+          </a:prstGeom>
+          <a:solidFill>
+            <a:srgbClr val="FFFFFF"/>
+          </a:solidFill>
+          <a:ln w="12700">
+            <a:solidFill>
+              <a:srgbClr val="999999"/>
+            </a:solidFill>
+          </a:ln>
+        </p:spPr>
+        <p:style>
+          <a:lnRef idx="1">
+            <a:schemeClr val="accent1"/>
+          </a:lnRef>
+          <a:fillRef idx="3">
+            <a:schemeClr val="accent1"/>
+          </a:fillRef>
+          <a:effectRef idx="2">
+            <a:schemeClr val="accent1"/>
+          </a:effectRef>
+          <a:fontRef idx="minor">
+            <a:schemeClr val="lt1"/>
+          </a:fontRef>
+        </p:style>
+        <p:txBody>
+          <a:bodyPr rtlCol="0" anchor="ctr"/>
+          <a:lstStyle/>
+          <a:p>
+            <a:pPr algn="ctr"/>
+          </a:p>
+        </p:txBody>
+      </p:sp>
+      <p:sp>
+        <p:nvSpPr>
+          <p:cNvPr id="27" name="TextBox 26"/>
+          <p:cNvSpPr txBox="1"/>
+          <p:nvPr/>
+        </p:nvSpPr>
+        <p:spPr>
+          <a:xfrm>
+            <a:off x="1600000" y="4950000"/>
             <a:ext cx="9600000" cy="520000"/>
           </a:xfrm>
           <a:prstGeom prst="rect">
@@ -4342,7 +6911,7 @@
                 <a:ea typeface="Open Sans"/>
                 <a:cs typeface="Open Sans"/>
               </a:rPr>
-              <a:t>КОГДА ПОМОЩЬ ПЕРЕДАНА</a:t>
+              <a:t>КОГДА ОТВЕТСТВЕННОСТЬ ФАКТИЧЕСКИ ПЕРЕДАНА</a:t>
             </a:r>
           </a:p>
         </p:txBody>
@@ -4515,8 +7084,8 @@
         </p:nvSpPr>
         <p:spPr>
           <a:xfrm>
-            <a:off x="700000" y="1600000"/>
-            <a:ext cx="11000000" cy="4200000"/>
+            <a:off x="700000" y="1500000"/>
+            <a:ext cx="11000000" cy="4900000"/>
           </a:xfrm>
           <a:prstGeom prst="rect">
             <a:avLst/>
@@ -4531,7 +7100,7 @@
           <a:p>
             <a:pPr algn="l"/>
             <a:r>
-              <a:rPr sz="1600" b="0">
+              <a:rPr sz="1500" b="0">
                 <a:solidFill>
                   <a:srgbClr val="333333"/>
                 </a:solidFill>
@@ -4539,7 +7108,7 @@
                 <a:ea typeface="Open Sans"/>
                 <a:cs typeface="Open Sans"/>
               </a:rPr>
-              <a:t>После прибытия бригады продолжайте помощь до устного распоряжения медицинского работника о передаче пострадавшего специалистам.</a:t>
+              <a:t>Само прибытие бригады не означает немедленного прекращения первой помощи. Продолжайте наблюдение и необходимые действия, пока медицинский работник не примет пострадавшего и не даст устное распоряжение о передаче или изменении помощи.</a:t>
             </a:r>
           </a:p>
         </p:txBody>
@@ -4637,7 +7206,7 @@
                 <a:ea typeface="Open Sans"/>
                 <a:cs typeface="Open Sans"/>
               </a:rPr>
-              <a:t>КРАТКИЙ ДОКЛАД БРИГАДЕ</a:t>
+              <a:t>ПОДГОТОВЬТЕСЬ К ВСТРЕЧЕ БРИГАДЫ</a:t>
             </a:r>
           </a:p>
         </p:txBody>
@@ -4810,8 +7379,8 @@
         </p:nvSpPr>
         <p:spPr>
           <a:xfrm>
-            <a:off x="700000" y="1450000"/>
-            <a:ext cx="550000" cy="550000"/>
+            <a:off x="700000" y="1400000"/>
+            <a:ext cx="500000" cy="500000"/>
           </a:xfrm>
           <a:prstGeom prst="ellipse">
             <a:avLst/>
@@ -4853,8 +7422,8 @@
         </p:nvSpPr>
         <p:spPr>
           <a:xfrm>
-            <a:off x="700000" y="1450000"/>
-            <a:ext cx="550000" cy="550000"/>
+            <a:off x="700000" y="1400000"/>
+            <a:ext cx="500000" cy="500000"/>
           </a:xfrm>
           <a:prstGeom prst="rect">
             <a:avLst/>
@@ -4869,7 +7438,7 @@
           <a:p>
             <a:pPr algn="ctr"/>
             <a:r>
-              <a:rPr sz="1400" b="1">
+              <a:rPr sz="1300" b="1">
                 <a:solidFill>
                   <a:srgbClr val="FFFFFF"/>
                 </a:solidFill>
@@ -4890,8 +7459,8 @@
         </p:nvSpPr>
         <p:spPr>
           <a:xfrm>
-            <a:off x="1450000" y="1450000"/>
-            <a:ext cx="10500000" cy="550000"/>
+            <a:off x="1400000" y="1400000"/>
+            <a:ext cx="10550000" cy="620000"/>
           </a:xfrm>
           <a:prstGeom prst="rect">
             <a:avLst/>
@@ -4935,8 +7504,8 @@
         </p:nvSpPr>
         <p:spPr>
           <a:xfrm>
-            <a:off x="1650000" y="1450000"/>
-            <a:ext cx="10100000" cy="550000"/>
+            <a:off x="1600000" y="1400000"/>
+            <a:ext cx="10150000" cy="620000"/>
           </a:xfrm>
           <a:prstGeom prst="rect">
             <a:avLst/>
@@ -4959,7 +7528,7 @@
                 <a:ea typeface="Open Sans"/>
                 <a:cs typeface="Open Sans"/>
               </a:rPr>
-              <a:t>Сообщите, что, где и когда произошло.</a:t>
+              <a:t>Обеспечьте свободный и безопасный путь к пострадавшему.</a:t>
             </a:r>
           </a:p>
         </p:txBody>
@@ -4972,8 +7541,8 @@
         </p:nvSpPr>
         <p:spPr>
           <a:xfrm>
-            <a:off x="700000" y="2320000"/>
-            <a:ext cx="550000" cy="550000"/>
+            <a:off x="700000" y="2100000"/>
+            <a:ext cx="500000" cy="500000"/>
           </a:xfrm>
           <a:prstGeom prst="ellipse">
             <a:avLst/>
@@ -5015,8 +7584,8 @@
         </p:nvSpPr>
         <p:spPr>
           <a:xfrm>
-            <a:off x="700000" y="2320000"/>
-            <a:ext cx="550000" cy="550000"/>
+            <a:off x="700000" y="2100000"/>
+            <a:ext cx="500000" cy="500000"/>
           </a:xfrm>
           <a:prstGeom prst="rect">
             <a:avLst/>
@@ -5031,7 +7600,7 @@
           <a:p>
             <a:pPr algn="ctr"/>
             <a:r>
-              <a:rPr sz="1400" b="1">
+              <a:rPr sz="1300" b="1">
                 <a:solidFill>
                   <a:srgbClr val="FFFFFF"/>
                 </a:solidFill>
@@ -5052,8 +7621,8 @@
         </p:nvSpPr>
         <p:spPr>
           <a:xfrm>
-            <a:off x="1450000" y="2320000"/>
-            <a:ext cx="10500000" cy="550000"/>
+            <a:off x="1400000" y="2100000"/>
+            <a:ext cx="10550000" cy="620000"/>
           </a:xfrm>
           <a:prstGeom prst="rect">
             <a:avLst/>
@@ -5097,8 +7666,8 @@
         </p:nvSpPr>
         <p:spPr>
           <a:xfrm>
-            <a:off x="1650000" y="2320000"/>
-            <a:ext cx="10100000" cy="550000"/>
+            <a:off x="1600000" y="2100000"/>
+            <a:ext cx="10150000" cy="620000"/>
           </a:xfrm>
           <a:prstGeom prst="rect">
             <a:avLst/>
@@ -5121,7 +7690,7 @@
                 <a:ea typeface="Open Sans"/>
                 <a:cs typeface="Open Sans"/>
               </a:rPr>
-              <a:t>Опишите первоначальное состояние пострадавшего.</a:t>
+              <a:t>Попросите помощника встретить бригаду и проводить к месту.</a:t>
             </a:r>
           </a:p>
         </p:txBody>
@@ -5134,8 +7703,8 @@
         </p:nvSpPr>
         <p:spPr>
           <a:xfrm>
-            <a:off x="700000" y="3190000"/>
-            <a:ext cx="550000" cy="550000"/>
+            <a:off x="700000" y="2800000"/>
+            <a:ext cx="500000" cy="500000"/>
           </a:xfrm>
           <a:prstGeom prst="ellipse">
             <a:avLst/>
@@ -5177,8 +7746,8 @@
         </p:nvSpPr>
         <p:spPr>
           <a:xfrm>
-            <a:off x="700000" y="3190000"/>
-            <a:ext cx="550000" cy="550000"/>
+            <a:off x="700000" y="2800000"/>
+            <a:ext cx="500000" cy="500000"/>
           </a:xfrm>
           <a:prstGeom prst="rect">
             <a:avLst/>
@@ -5193,7 +7762,7 @@
           <a:p>
             <a:pPr algn="ctr"/>
             <a:r>
-              <a:rPr sz="1400" b="1">
+              <a:rPr sz="1300" b="1">
                 <a:solidFill>
                   <a:srgbClr val="FFFFFF"/>
                 </a:solidFill>
@@ -5214,8 +7783,8 @@
         </p:nvSpPr>
         <p:spPr>
           <a:xfrm>
-            <a:off x="1450000" y="3190000"/>
-            <a:ext cx="10500000" cy="550000"/>
+            <a:off x="1400000" y="2800000"/>
+            <a:ext cx="10550000" cy="620000"/>
           </a:xfrm>
           <a:prstGeom prst="rect">
             <a:avLst/>
@@ -5259,8 +7828,8 @@
         </p:nvSpPr>
         <p:spPr>
           <a:xfrm>
-            <a:off x="1650000" y="3190000"/>
-            <a:ext cx="10100000" cy="550000"/>
+            <a:off x="1600000" y="2800000"/>
+            <a:ext cx="10150000" cy="620000"/>
           </a:xfrm>
           <a:prstGeom prst="rect">
             <a:avLst/>
@@ -5283,7 +7852,7 @@
                 <a:ea typeface="Open Sans"/>
                 <a:cs typeface="Open Sans"/>
               </a:rPr>
-              <a:t>Перечислите обнаруженные травмы и жалобы.</a:t>
+              <a:t>Подготовьте краткую последовательность событий и действий.</a:t>
             </a:r>
           </a:p>
         </p:txBody>
@@ -5296,8 +7865,8 @@
         </p:nvSpPr>
         <p:spPr>
           <a:xfrm>
-            <a:off x="700000" y="4060000"/>
-            <a:ext cx="550000" cy="550000"/>
+            <a:off x="700000" y="3500000"/>
+            <a:ext cx="500000" cy="500000"/>
           </a:xfrm>
           <a:prstGeom prst="ellipse">
             <a:avLst/>
@@ -5339,8 +7908,8 @@
         </p:nvSpPr>
         <p:spPr>
           <a:xfrm>
-            <a:off x="700000" y="4060000"/>
-            <a:ext cx="550000" cy="550000"/>
+            <a:off x="700000" y="3500000"/>
+            <a:ext cx="500000" cy="500000"/>
           </a:xfrm>
           <a:prstGeom prst="rect">
             <a:avLst/>
@@ -5355,7 +7924,7 @@
           <a:p>
             <a:pPr algn="ctr"/>
             <a:r>
-              <a:rPr sz="1400" b="1">
+              <a:rPr sz="1300" b="1">
                 <a:solidFill>
                   <a:srgbClr val="FFFFFF"/>
                 </a:solidFill>
@@ -5376,8 +7945,8 @@
         </p:nvSpPr>
         <p:spPr>
           <a:xfrm>
-            <a:off x="1450000" y="4060000"/>
-            <a:ext cx="10500000" cy="550000"/>
+            <a:off x="1400000" y="3500000"/>
+            <a:ext cx="10550000" cy="620000"/>
           </a:xfrm>
           <a:prstGeom prst="rect">
             <a:avLst/>
@@ -5421,8 +7990,8 @@
         </p:nvSpPr>
         <p:spPr>
           <a:xfrm>
-            <a:off x="1650000" y="4060000"/>
-            <a:ext cx="10100000" cy="550000"/>
+            <a:off x="1600000" y="3500000"/>
+            <a:ext cx="10150000" cy="620000"/>
           </a:xfrm>
           <a:prstGeom prst="rect">
             <a:avLst/>
@@ -5445,7 +8014,7 @@
                 <a:ea typeface="Open Sans"/>
                 <a:cs typeface="Open Sans"/>
               </a:rPr>
-              <a:t>Расскажите, какую помощь и когда оказали.</a:t>
+              <a:t>Соберите упаковки веществ, лекарства, документы и записанное время.</a:t>
             </a:r>
           </a:p>
         </p:txBody>
@@ -5458,8 +8027,8 @@
         </p:nvSpPr>
         <p:spPr>
           <a:xfrm>
-            <a:off x="700000" y="4930000"/>
-            <a:ext cx="550000" cy="550000"/>
+            <a:off x="700000" y="4200000"/>
+            <a:ext cx="500000" cy="500000"/>
           </a:xfrm>
           <a:prstGeom prst="ellipse">
             <a:avLst/>
@@ -5501,8 +8070,8 @@
         </p:nvSpPr>
         <p:spPr>
           <a:xfrm>
-            <a:off x="700000" y="4930000"/>
-            <a:ext cx="550000" cy="550000"/>
+            <a:off x="700000" y="4200000"/>
+            <a:ext cx="500000" cy="500000"/>
           </a:xfrm>
           <a:prstGeom prst="rect">
             <a:avLst/>
@@ -5517,7 +8086,7 @@
           <a:p>
             <a:pPr algn="ctr"/>
             <a:r>
-              <a:rPr sz="1400" b="1">
+              <a:rPr sz="1300" b="1">
                 <a:solidFill>
                   <a:srgbClr val="FFFFFF"/>
                 </a:solidFill>
@@ -5538,8 +8107,8 @@
         </p:nvSpPr>
         <p:spPr>
           <a:xfrm>
-            <a:off x="1450000" y="4930000"/>
-            <a:ext cx="10500000" cy="550000"/>
+            <a:off x="1400000" y="4200000"/>
+            <a:ext cx="10550000" cy="620000"/>
           </a:xfrm>
           <a:prstGeom prst="rect">
             <a:avLst/>
@@ -5583,8 +8152,8 @@
         </p:nvSpPr>
         <p:spPr>
           <a:xfrm>
-            <a:off x="1650000" y="4930000"/>
-            <a:ext cx="10100000" cy="550000"/>
+            <a:off x="1600000" y="4200000"/>
+            <a:ext cx="10150000" cy="620000"/>
           </a:xfrm>
           <a:prstGeom prst="rect">
             <a:avLst/>
@@ -5607,7 +8176,7 @@
                 <a:ea typeface="Open Sans"/>
                 <a:cs typeface="Open Sans"/>
               </a:rPr>
-              <a:t>Отметьте изменения сознания, дыхания и кровотечения.</a:t>
+              <a:t>Продолжайте контролировать сознание, дыхание и кровотечение.</a:t>
             </a:r>
           </a:p>
         </p:txBody>
@@ -5620,8 +8189,8 @@
         </p:nvSpPr>
         <p:spPr>
           <a:xfrm>
-            <a:off x="700000" y="5800000"/>
-            <a:ext cx="550000" cy="550000"/>
+            <a:off x="700000" y="4900000"/>
+            <a:ext cx="500000" cy="500000"/>
           </a:xfrm>
           <a:prstGeom prst="ellipse">
             <a:avLst/>
@@ -5663,8 +8232,8 @@
         </p:nvSpPr>
         <p:spPr>
           <a:xfrm>
-            <a:off x="700000" y="5800000"/>
-            <a:ext cx="550000" cy="550000"/>
+            <a:off x="700000" y="4900000"/>
+            <a:ext cx="500000" cy="500000"/>
           </a:xfrm>
           <a:prstGeom prst="rect">
             <a:avLst/>
@@ -5679,7 +8248,7 @@
           <a:p>
             <a:pPr algn="ctr"/>
             <a:r>
-              <a:rPr sz="1400" b="1">
+              <a:rPr sz="1300" b="1">
                 <a:solidFill>
                   <a:srgbClr val="FFFFFF"/>
                 </a:solidFill>
@@ -5700,8 +8269,8 @@
         </p:nvSpPr>
         <p:spPr>
           <a:xfrm>
-            <a:off x="1450000" y="5800000"/>
-            <a:ext cx="10500000" cy="550000"/>
+            <a:off x="1400000" y="4900000"/>
+            <a:ext cx="10550000" cy="620000"/>
           </a:xfrm>
           <a:prstGeom prst="rect">
             <a:avLst/>
@@ -5745,8 +8314,8 @@
         </p:nvSpPr>
         <p:spPr>
           <a:xfrm>
-            <a:off x="1650000" y="5800000"/>
-            <a:ext cx="10100000" cy="550000"/>
+            <a:off x="1600000" y="4900000"/>
+            <a:ext cx="10150000" cy="620000"/>
           </a:xfrm>
           <a:prstGeom prst="rect">
             <a:avLst/>
@@ -5769,7 +8338,7 @@
                 <a:ea typeface="Open Sans"/>
                 <a:cs typeface="Open Sans"/>
               </a:rPr>
-              <a:t>Сообщите о принятых пострадавшим лекарствах.</a:t>
+              <a:t>Не снимайте повязки и средства фиксации без указания специалиста.</a:t>
             </a:r>
           </a:p>
         </p:txBody>
@@ -5867,7 +8436,7 @@
                 <a:ea typeface="Open Sans"/>
                 <a:cs typeface="Open Sans"/>
               </a:rPr>
-              <a:t>ОТВЕЧАЙТЕ ТОЧНО</a:t>
+              <a:t>НАЧНИТЕ С ОБСТОЯТЕЛЬСТВ</a:t>
             </a:r>
           </a:p>
         </p:txBody>
@@ -6040,8 +8609,8 @@
         </p:nvSpPr>
         <p:spPr>
           <a:xfrm>
-            <a:off x="700000" y="1500000"/>
-            <a:ext cx="11000000" cy="4200000"/>
+            <a:off x="700000" y="1450000"/>
+            <a:ext cx="11000000" cy="4000000"/>
           </a:xfrm>
           <a:prstGeom prst="rect">
             <a:avLst/>
@@ -6068,7 +8637,7 @@
                 <a:ea typeface="Open Sans"/>
                 <a:cs typeface="Open Sans"/>
               </a:rPr>
-              <a:t>•  Говорите кратко и по порядку</a:t>
+              <a:t>•  Что именно произошло: падение, удар, ожог, отравление или другое событие.</a:t>
             </a:r>
           </a:p>
           <a:p>
@@ -6086,7 +8655,7 @@
                 <a:ea typeface="Open Sans"/>
                 <a:cs typeface="Open Sans"/>
               </a:rPr>
-              <a:t>•  Отделяйте увиденное от предположений</a:t>
+              <a:t>•  Где произошло событие и сохранялись ли опасные факторы.</a:t>
             </a:r>
           </a:p>
           <a:p>
@@ -6104,7 +8673,7 @@
                 <a:ea typeface="Open Sans"/>
                 <a:cs typeface="Open Sans"/>
               </a:rPr>
-              <a:t>•  Покажите упаковки веществ или лекарств</a:t>
+              <a:t>•  Когда это произошло или когда пострадавшего обнаружили.</a:t>
             </a:r>
           </a:p>
           <a:p>
@@ -6122,7 +8691,7 @@
                 <a:ea typeface="Open Sans"/>
                 <a:cs typeface="Open Sans"/>
               </a:rPr>
-              <a:t>•  Назовите известные сведения о пострадавшем</a:t>
+              <a:t>•  Какой механизм травмы наблюдался: высота, скорость, направление удара.</a:t>
             </a:r>
           </a:p>
           <a:p>
@@ -6140,7 +8709,7 @@
                 <a:ea typeface="Open Sans"/>
                 <a:cs typeface="Open Sans"/>
               </a:rPr>
-              <a:t>•  Ответьте на уточняющие вопросы</a:t>
+              <a:t>•  Были ли другие пострадавшие или свидетели.</a:t>
             </a:r>
           </a:p>
         </p:txBody>
@@ -6212,7 +8781,7 @@
           <a:p>
             <a:pPr algn="l"/>
             <a:r>
-              <a:rPr sz="1300" b="0">
+              <a:rPr sz="1200" b="0">
                 <a:solidFill>
                   <a:srgbClr val="333333"/>
                 </a:solidFill>
@@ -6220,7 +8789,7 @@
                 <a:ea typeface="Open Sans"/>
                 <a:cs typeface="Open Sans"/>
               </a:rPr>
-              <a:t>Если чего-то не знаете, прямо скажите об этом.</a:t>
+              <a:t>Сначала сообщайте факты, которые видели сами; сведения со слов других обозначайте отдельно.</a:t>
             </a:r>
           </a:p>
         </p:txBody>
@@ -6318,7 +8887,7 @@
                 <a:ea typeface="Open Sans"/>
                 <a:cs typeface="Open Sans"/>
               </a:rPr>
-              <a:t>ПОМОЩЬ ПОСЛЕ ПЕРЕДАЧИ</a:t>
+              <a:t>СОСТОЯНИЕ И НАЙДЕННЫЕ ПОВРЕЖДЕНИЯ</a:t>
             </a:r>
           </a:p>
         </p:txBody>
@@ -6485,139 +9054,14 @@
       </p:sp>
       <p:sp>
         <p:nvSpPr>
-          <p:cNvPr id="8" name="Rectangle 7"/>
-          <p:cNvSpPr/>
-          <p:nvPr/>
-        </p:nvSpPr>
-        <p:spPr>
-          <a:xfrm>
-            <a:off x="700000" y="1450000"/>
-            <a:ext cx="5375000" cy="2300000"/>
-          </a:xfrm>
-          <a:prstGeom prst="rect">
-            <a:avLst/>
-          </a:prstGeom>
-          <a:solidFill>
-            <a:srgbClr val="FFFFFF"/>
-          </a:solidFill>
-          <a:ln w="12700">
-            <a:solidFill>
-              <a:srgbClr val="999999"/>
-            </a:solidFill>
-          </a:ln>
-        </p:spPr>
-        <p:style>
-          <a:lnRef idx="1">
-            <a:schemeClr val="accent1"/>
-          </a:lnRef>
-          <a:fillRef idx="3">
-            <a:schemeClr val="accent1"/>
-          </a:fillRef>
-          <a:effectRef idx="2">
-            <a:schemeClr val="accent1"/>
-          </a:effectRef>
-          <a:fontRef idx="minor">
-            <a:schemeClr val="lt1"/>
-          </a:fontRef>
-        </p:style>
-        <p:txBody>
-          <a:bodyPr rtlCol="0" anchor="ctr"/>
-          <a:lstStyle/>
-          <a:p>
-            <a:pPr algn="ctr"/>
-          </a:p>
-        </p:txBody>
-      </p:sp>
-      <p:sp>
-        <p:nvSpPr>
-          <p:cNvPr id="9" name="Oval 8"/>
-          <p:cNvSpPr/>
-          <p:nvPr/>
-        </p:nvSpPr>
-        <p:spPr>
-          <a:xfrm>
-            <a:off x="850000" y="1650000"/>
-            <a:ext cx="500000" cy="500000"/>
-          </a:xfrm>
-          <a:prstGeom prst="ellipse">
-            <a:avLst/>
-          </a:prstGeom>
-          <a:solidFill>
-            <a:srgbClr val="555555"/>
-          </a:solidFill>
-          <a:ln>
-            <a:noFill/>
-          </a:ln>
-        </p:spPr>
-        <p:style>
-          <a:lnRef idx="1">
-            <a:schemeClr val="accent1"/>
-          </a:lnRef>
-          <a:fillRef idx="3">
-            <a:schemeClr val="accent1"/>
-          </a:fillRef>
-          <a:effectRef idx="2">
-            <a:schemeClr val="accent1"/>
-          </a:effectRef>
-          <a:fontRef idx="minor">
-            <a:schemeClr val="lt1"/>
-          </a:fontRef>
-        </p:style>
-        <p:txBody>
-          <a:bodyPr rtlCol="0" anchor="ctr"/>
-          <a:lstStyle/>
-          <a:p>
-            <a:pPr algn="ctr"/>
-          </a:p>
-        </p:txBody>
-      </p:sp>
-      <p:sp>
-        <p:nvSpPr>
-          <p:cNvPr id="10" name="TextBox 9"/>
+          <p:cNvPr id="8" name="TextBox 7"/>
           <p:cNvSpPr txBox="1"/>
           <p:nvPr/>
         </p:nvSpPr>
         <p:spPr>
           <a:xfrm>
-            <a:off x="850000" y="1650000"/>
-            <a:ext cx="500000" cy="500000"/>
-          </a:xfrm>
-          <a:prstGeom prst="rect">
-            <a:avLst/>
-          </a:prstGeom>
-          <a:noFill/>
-        </p:spPr>
-        <p:txBody>
-          <a:bodyPr wrap="square" anchor="ctr">
-            <a:spAutoFit/>
-          </a:bodyPr>
-          <a:lstStyle/>
-          <a:p>
-            <a:pPr algn="ctr"/>
-            <a:r>
-              <a:rPr sz="1400" b="1">
-                <a:solidFill>
-                  <a:srgbClr val="FFFFFF"/>
-                </a:solidFill>
-                <a:latin typeface="Open Sans"/>
-                <a:ea typeface="Open Sans"/>
-                <a:cs typeface="Open Sans"/>
-              </a:rPr>
-              <a:t>1</a:t>
-            </a:r>
-          </a:p>
-        </p:txBody>
-      </p:sp>
-      <p:sp>
-        <p:nvSpPr>
-          <p:cNvPr id="11" name="TextBox 10"/>
-          <p:cNvSpPr txBox="1"/>
-          <p:nvPr/>
-        </p:nvSpPr>
-        <p:spPr>
-          <a:xfrm>
-            <a:off x="1450000" y="1700000"/>
-            <a:ext cx="4475000" cy="450000"/>
+            <a:off x="700000" y="1400000"/>
+            <a:ext cx="5400000" cy="400000"/>
           </a:xfrm>
           <a:prstGeom prst="rect">
             <a:avLst/>
@@ -6632,7 +9076,7 @@
           <a:p>
             <a:pPr algn="l"/>
             <a:r>
-              <a:rPr sz="1300" b="1">
+              <a:rPr sz="1400" b="1">
                 <a:solidFill>
                   <a:srgbClr val="333333"/>
                 </a:solidFill>
@@ -6640,21 +9084,21 @@
                 <a:ea typeface="Open Sans"/>
                 <a:cs typeface="Open Sans"/>
               </a:rPr>
-              <a:t>Освободите доступ</a:t>
-            </a:r>
-          </a:p>
-        </p:txBody>
-      </p:sp>
-      <p:sp>
-        <p:nvSpPr>
-          <p:cNvPr id="12" name="TextBox 11"/>
+              <a:t>Исходное состояние</a:t>
+            </a:r>
+          </a:p>
+        </p:txBody>
+      </p:sp>
+      <p:sp>
+        <p:nvSpPr>
+          <p:cNvPr id="9" name="TextBox 8"/>
           <p:cNvSpPr txBox="1"/>
           <p:nvPr/>
         </p:nvSpPr>
         <p:spPr>
           <a:xfrm>
-            <a:off x="850000" y="2300000"/>
-            <a:ext cx="5075000" cy="1300000"/>
+            <a:off x="6600000" y="1400000"/>
+            <a:ext cx="5400000" cy="400000"/>
           </a:xfrm>
           <a:prstGeom prst="rect">
             <a:avLst/>
@@ -6669,117 +9113,29 @@
           <a:p>
             <a:pPr algn="l"/>
             <a:r>
-              <a:rPr sz="1200" b="0">
-                <a:solidFill>
-                  <a:srgbClr val="666666"/>
-                </a:solidFill>
-                <a:latin typeface="Open Sans"/>
-                <a:ea typeface="Open Sans"/>
-                <a:cs typeface="Open Sans"/>
-              </a:rPr>
-              <a:t>Уберите лишних людей и предметы с пути бригады.</a:t>
-            </a:r>
-          </a:p>
-        </p:txBody>
-      </p:sp>
-      <p:sp>
-        <p:nvSpPr>
-          <p:cNvPr id="13" name="Rectangle 12"/>
-          <p:cNvSpPr/>
-          <p:nvPr/>
-        </p:nvSpPr>
-        <p:spPr>
-          <a:xfrm>
-            <a:off x="6325000" y="1450000"/>
-            <a:ext cx="5375000" cy="2300000"/>
-          </a:xfrm>
-          <a:prstGeom prst="rect">
-            <a:avLst/>
-          </a:prstGeom>
-          <a:solidFill>
-            <a:srgbClr val="FFFFFF"/>
-          </a:solidFill>
-          <a:ln w="12700">
-            <a:solidFill>
-              <a:srgbClr val="999999"/>
-            </a:solidFill>
-          </a:ln>
-        </p:spPr>
-        <p:style>
-          <a:lnRef idx="1">
-            <a:schemeClr val="accent1"/>
-          </a:lnRef>
-          <a:fillRef idx="3">
-            <a:schemeClr val="accent1"/>
-          </a:fillRef>
-          <a:effectRef idx="2">
-            <a:schemeClr val="accent1"/>
-          </a:effectRef>
-          <a:fontRef idx="minor">
-            <a:schemeClr val="lt1"/>
-          </a:fontRef>
-        </p:style>
-        <p:txBody>
-          <a:bodyPr rtlCol="0" anchor="ctr"/>
-          <a:lstStyle/>
-          <a:p>
-            <a:pPr algn="ctr"/>
-          </a:p>
-        </p:txBody>
-      </p:sp>
-      <p:sp>
-        <p:nvSpPr>
-          <p:cNvPr id="14" name="Oval 13"/>
-          <p:cNvSpPr/>
-          <p:nvPr/>
-        </p:nvSpPr>
-        <p:spPr>
-          <a:xfrm>
-            <a:off x="6475000" y="1650000"/>
-            <a:ext cx="500000" cy="500000"/>
-          </a:xfrm>
-          <a:prstGeom prst="ellipse">
-            <a:avLst/>
-          </a:prstGeom>
-          <a:solidFill>
-            <a:srgbClr val="555555"/>
-          </a:solidFill>
-          <a:ln>
-            <a:noFill/>
-          </a:ln>
-        </p:spPr>
-        <p:style>
-          <a:lnRef idx="1">
-            <a:schemeClr val="accent1"/>
-          </a:lnRef>
-          <a:fillRef idx="3">
-            <a:schemeClr val="accent1"/>
-          </a:fillRef>
-          <a:effectRef idx="2">
-            <a:schemeClr val="accent1"/>
-          </a:effectRef>
-          <a:fontRef idx="minor">
-            <a:schemeClr val="lt1"/>
-          </a:fontRef>
-        </p:style>
-        <p:txBody>
-          <a:bodyPr rtlCol="0" anchor="ctr"/>
-          <a:lstStyle/>
-          <a:p>
-            <a:pPr algn="ctr"/>
-          </a:p>
-        </p:txBody>
-      </p:sp>
-      <p:sp>
-        <p:nvSpPr>
-          <p:cNvPr id="15" name="TextBox 14"/>
+              <a:rPr sz="1400" b="1">
+                <a:solidFill>
+                  <a:srgbClr val="333333"/>
+                </a:solidFill>
+                <a:latin typeface="Open Sans"/>
+                <a:ea typeface="Open Sans"/>
+                <a:cs typeface="Open Sans"/>
+              </a:rPr>
+              <a:t>Подробный осмотр</a:t>
+            </a:r>
+          </a:p>
+        </p:txBody>
+      </p:sp>
+      <p:sp>
+        <p:nvSpPr>
+          <p:cNvPr id="10" name="TextBox 9"/>
           <p:cNvSpPr txBox="1"/>
           <p:nvPr/>
         </p:nvSpPr>
         <p:spPr>
           <a:xfrm>
-            <a:off x="6475000" y="1650000"/>
-            <a:ext cx="500000" cy="500000"/>
+            <a:off x="700000" y="1850000"/>
+            <a:ext cx="5400000" cy="4000000"/>
           </a:xfrm>
           <a:prstGeom prst="rect">
             <a:avLst/>
@@ -6787,36 +9143,94 @@
           <a:noFill/>
         </p:spPr>
         <p:txBody>
-          <a:bodyPr wrap="square" anchor="ctr">
+          <a:bodyPr wrap="square">
             <a:spAutoFit/>
           </a:bodyPr>
           <a:lstStyle/>
           <a:p>
-            <a:pPr algn="ctr"/>
-            <a:r>
-              <a:rPr sz="1400" b="1">
-                <a:solidFill>
-                  <a:srgbClr val="FFFFFF"/>
-                </a:solidFill>
-                <a:latin typeface="Open Sans"/>
-                <a:ea typeface="Open Sans"/>
-                <a:cs typeface="Open Sans"/>
-              </a:rPr>
-              <a:t>2</a:t>
-            </a:r>
-          </a:p>
-        </p:txBody>
-      </p:sp>
-      <p:sp>
-        <p:nvSpPr>
-          <p:cNvPr id="16" name="TextBox 15"/>
+            <a:pPr algn="l">
+              <a:spcAft>
+                <a:spcPts val="800"/>
+              </a:spcAft>
+            </a:pPr>
+            <a:r>
+              <a:rPr sz="1300" b="0">
+                <a:solidFill>
+                  <a:srgbClr val="333333"/>
+                </a:solidFill>
+                <a:latin typeface="Open Sans"/>
+                <a:ea typeface="Open Sans"/>
+                <a:cs typeface="Open Sans"/>
+              </a:rPr>
+              <a:t>•  был ли человек в сознании</a:t>
+            </a:r>
+          </a:p>
+          <a:p>
+            <a:pPr algn="l">
+              <a:spcAft>
+                <a:spcPts val="800"/>
+              </a:spcAft>
+            </a:pPr>
+            <a:r>
+              <a:rPr sz="1300" b="0">
+                <a:solidFill>
+                  <a:srgbClr val="333333"/>
+                </a:solidFill>
+                <a:latin typeface="Open Sans"/>
+                <a:ea typeface="Open Sans"/>
+                <a:cs typeface="Open Sans"/>
+              </a:rPr>
+              <a:t>•  было ли нормальное дыхание</a:t>
+            </a:r>
+          </a:p>
+          <a:p>
+            <a:pPr algn="l">
+              <a:spcAft>
+                <a:spcPts val="800"/>
+              </a:spcAft>
+            </a:pPr>
+            <a:r>
+              <a:rPr sz="1300" b="0">
+                <a:solidFill>
+                  <a:srgbClr val="333333"/>
+                </a:solidFill>
+                <a:latin typeface="Open Sans"/>
+                <a:ea typeface="Open Sans"/>
+                <a:cs typeface="Open Sans"/>
+              </a:rPr>
+              <a:t>•  наблюдалось ли массивное кровотечение</a:t>
+            </a:r>
+          </a:p>
+          <a:p>
+            <a:pPr algn="l">
+              <a:spcAft>
+                <a:spcPts val="800"/>
+              </a:spcAft>
+            </a:pPr>
+            <a:r>
+              <a:rPr sz="1300" b="0">
+                <a:solidFill>
+                  <a:srgbClr val="333333"/>
+                </a:solidFill>
+                <a:latin typeface="Open Sans"/>
+                <a:ea typeface="Open Sans"/>
+                <a:cs typeface="Open Sans"/>
+              </a:rPr>
+              <a:t>•  были ли судороги, рвота или резкое ухудшение</a:t>
+            </a:r>
+          </a:p>
+        </p:txBody>
+      </p:sp>
+      <p:sp>
+        <p:nvSpPr>
+          <p:cNvPr id="11" name="TextBox 10"/>
           <p:cNvSpPr txBox="1"/>
           <p:nvPr/>
         </p:nvSpPr>
         <p:spPr>
           <a:xfrm>
-            <a:off x="7075000" y="1700000"/>
-            <a:ext cx="4475000" cy="450000"/>
+            <a:off x="6600000" y="1850000"/>
+            <a:ext cx="5400000" cy="4000000"/>
           </a:xfrm>
           <a:prstGeom prst="rect">
             <a:avLst/>
@@ -6824,14 +9238,18 @@
           <a:noFill/>
         </p:spPr>
         <p:txBody>
-          <a:bodyPr wrap="square" anchor="t">
+          <a:bodyPr wrap="square">
             <a:spAutoFit/>
           </a:bodyPr>
           <a:lstStyle/>
           <a:p>
-            <a:pPr algn="l"/>
-            <a:r>
-              <a:rPr sz="1300" b="1">
+            <a:pPr algn="l">
+              <a:spcAft>
+                <a:spcPts val="800"/>
+              </a:spcAft>
+            </a:pPr>
+            <a:r>
+              <a:rPr sz="1300" b="0">
                 <a:solidFill>
                   <a:srgbClr val="333333"/>
                 </a:solidFill>
@@ -6839,198 +9257,17 @@
                 <a:ea typeface="Open Sans"/>
                 <a:cs typeface="Open Sans"/>
               </a:rPr>
-              <a:t>Принесите нужное</a:t>
-            </a:r>
-          </a:p>
-        </p:txBody>
-      </p:sp>
-      <p:sp>
-        <p:nvSpPr>
-          <p:cNvPr id="17" name="TextBox 16"/>
-          <p:cNvSpPr txBox="1"/>
-          <p:nvPr/>
-        </p:nvSpPr>
-        <p:spPr>
-          <a:xfrm>
-            <a:off x="6475000" y="2300000"/>
-            <a:ext cx="5075000" cy="1300000"/>
-          </a:xfrm>
-          <a:prstGeom prst="rect">
-            <a:avLst/>
-          </a:prstGeom>
-          <a:noFill/>
-        </p:spPr>
-        <p:txBody>
-          <a:bodyPr wrap="square" anchor="t">
-            <a:spAutoFit/>
-          </a:bodyPr>
-          <a:lstStyle/>
-          <a:p>
-            <a:pPr algn="l"/>
-            <a:r>
-              <a:rPr sz="1200" b="0">
-                <a:solidFill>
-                  <a:srgbClr val="666666"/>
-                </a:solidFill>
-                <a:latin typeface="Open Sans"/>
-                <a:ea typeface="Open Sans"/>
-                <a:cs typeface="Open Sans"/>
-              </a:rPr>
-              <a:t>Передайте документы, упаковки и личные лекарства.</a:t>
-            </a:r>
-          </a:p>
-        </p:txBody>
-      </p:sp>
-      <p:sp>
-        <p:nvSpPr>
-          <p:cNvPr id="18" name="Rectangle 17"/>
-          <p:cNvSpPr/>
-          <p:nvPr/>
-        </p:nvSpPr>
-        <p:spPr>
-          <a:xfrm>
-            <a:off x="700000" y="3950000"/>
-            <a:ext cx="5375000" cy="2300000"/>
-          </a:xfrm>
-          <a:prstGeom prst="rect">
-            <a:avLst/>
-          </a:prstGeom>
-          <a:solidFill>
-            <a:srgbClr val="FFFFFF"/>
-          </a:solidFill>
-          <a:ln w="12700">
-            <a:solidFill>
-              <a:srgbClr val="999999"/>
-            </a:solidFill>
-          </a:ln>
-        </p:spPr>
-        <p:style>
-          <a:lnRef idx="1">
-            <a:schemeClr val="accent1"/>
-          </a:lnRef>
-          <a:fillRef idx="3">
-            <a:schemeClr val="accent1"/>
-          </a:fillRef>
-          <a:effectRef idx="2">
-            <a:schemeClr val="accent1"/>
-          </a:effectRef>
-          <a:fontRef idx="minor">
-            <a:schemeClr val="lt1"/>
-          </a:fontRef>
-        </p:style>
-        <p:txBody>
-          <a:bodyPr rtlCol="0" anchor="ctr"/>
-          <a:lstStyle/>
-          <a:p>
-            <a:pPr algn="ctr"/>
-          </a:p>
-        </p:txBody>
-      </p:sp>
-      <p:sp>
-        <p:nvSpPr>
-          <p:cNvPr id="19" name="Oval 18"/>
-          <p:cNvSpPr/>
-          <p:nvPr/>
-        </p:nvSpPr>
-        <p:spPr>
-          <a:xfrm>
-            <a:off x="850000" y="4150000"/>
-            <a:ext cx="500000" cy="500000"/>
-          </a:xfrm>
-          <a:prstGeom prst="ellipse">
-            <a:avLst/>
-          </a:prstGeom>
-          <a:solidFill>
-            <a:srgbClr val="555555"/>
-          </a:solidFill>
-          <a:ln>
-            <a:noFill/>
-          </a:ln>
-        </p:spPr>
-        <p:style>
-          <a:lnRef idx="1">
-            <a:schemeClr val="accent1"/>
-          </a:lnRef>
-          <a:fillRef idx="3">
-            <a:schemeClr val="accent1"/>
-          </a:fillRef>
-          <a:effectRef idx="2">
-            <a:schemeClr val="accent1"/>
-          </a:effectRef>
-          <a:fontRef idx="minor">
-            <a:schemeClr val="lt1"/>
-          </a:fontRef>
-        </p:style>
-        <p:txBody>
-          <a:bodyPr rtlCol="0" anchor="ctr"/>
-          <a:lstStyle/>
-          <a:p>
-            <a:pPr algn="ctr"/>
-          </a:p>
-        </p:txBody>
-      </p:sp>
-      <p:sp>
-        <p:nvSpPr>
-          <p:cNvPr id="20" name="TextBox 19"/>
-          <p:cNvSpPr txBox="1"/>
-          <p:nvPr/>
-        </p:nvSpPr>
-        <p:spPr>
-          <a:xfrm>
-            <a:off x="850000" y="4150000"/>
-            <a:ext cx="500000" cy="500000"/>
-          </a:xfrm>
-          <a:prstGeom prst="rect">
-            <a:avLst/>
-          </a:prstGeom>
-          <a:noFill/>
-        </p:spPr>
-        <p:txBody>
-          <a:bodyPr wrap="square" anchor="ctr">
-            <a:spAutoFit/>
-          </a:bodyPr>
-          <a:lstStyle/>
-          <a:p>
-            <a:pPr algn="ctr"/>
-            <a:r>
-              <a:rPr sz="1400" b="1">
-                <a:solidFill>
-                  <a:srgbClr val="FFFFFF"/>
-                </a:solidFill>
-                <a:latin typeface="Open Sans"/>
-                <a:ea typeface="Open Sans"/>
-                <a:cs typeface="Open Sans"/>
-              </a:rPr>
-              <a:t>3</a:t>
-            </a:r>
-          </a:p>
-        </p:txBody>
-      </p:sp>
-      <p:sp>
-        <p:nvSpPr>
-          <p:cNvPr id="21" name="TextBox 20"/>
-          <p:cNvSpPr txBox="1"/>
-          <p:nvPr/>
-        </p:nvSpPr>
-        <p:spPr>
-          <a:xfrm>
-            <a:off x="1450000" y="4200000"/>
-            <a:ext cx="4475000" cy="450000"/>
-          </a:xfrm>
-          <a:prstGeom prst="rect">
-            <a:avLst/>
-          </a:prstGeom>
-          <a:noFill/>
-        </p:spPr>
-        <p:txBody>
-          <a:bodyPr wrap="square" anchor="t">
-            <a:spAutoFit/>
-          </a:bodyPr>
-          <a:lstStyle/>
-          <a:p>
-            <a:pPr algn="l"/>
-            <a:r>
-              <a:rPr sz="1300" b="1">
+              <a:t>•  жалобы и локализация боли</a:t>
+            </a:r>
+          </a:p>
+          <a:p>
+            <a:pPr algn="l">
+              <a:spcAft>
+                <a:spcPts val="800"/>
+              </a:spcAft>
+            </a:pPr>
+            <a:r>
+              <a:rPr sz="1300" b="0">
                 <a:solidFill>
                   <a:srgbClr val="333333"/>
                 </a:solidFill>
@@ -7038,198 +9275,17 @@
                 <a:ea typeface="Open Sans"/>
                 <a:cs typeface="Open Sans"/>
               </a:rPr>
-              <a:t>Помогите перенести</a:t>
-            </a:r>
-          </a:p>
-        </p:txBody>
-      </p:sp>
-      <p:sp>
-        <p:nvSpPr>
-          <p:cNvPr id="22" name="TextBox 21"/>
-          <p:cNvSpPr txBox="1"/>
-          <p:nvPr/>
-        </p:nvSpPr>
-        <p:spPr>
-          <a:xfrm>
-            <a:off x="850000" y="4800000"/>
-            <a:ext cx="5075000" cy="1300000"/>
-          </a:xfrm>
-          <a:prstGeom prst="rect">
-            <a:avLst/>
-          </a:prstGeom>
-          <a:noFill/>
-        </p:spPr>
-        <p:txBody>
-          <a:bodyPr wrap="square" anchor="t">
-            <a:spAutoFit/>
-          </a:bodyPr>
-          <a:lstStyle/>
-          <a:p>
-            <a:pPr algn="l"/>
-            <a:r>
-              <a:rPr sz="1200" b="0">
-                <a:solidFill>
-                  <a:srgbClr val="666666"/>
-                </a:solidFill>
-                <a:latin typeface="Open Sans"/>
-                <a:ea typeface="Open Sans"/>
-                <a:cs typeface="Open Sans"/>
-              </a:rPr>
-              <a:t>Участвуйте только по просьбе и командам специалистов.</a:t>
-            </a:r>
-          </a:p>
-        </p:txBody>
-      </p:sp>
-      <p:sp>
-        <p:nvSpPr>
-          <p:cNvPr id="23" name="Rectangle 22"/>
-          <p:cNvSpPr/>
-          <p:nvPr/>
-        </p:nvSpPr>
-        <p:spPr>
-          <a:xfrm>
-            <a:off x="6325000" y="3950000"/>
-            <a:ext cx="5375000" cy="2300000"/>
-          </a:xfrm>
-          <a:prstGeom prst="rect">
-            <a:avLst/>
-          </a:prstGeom>
-          <a:solidFill>
-            <a:srgbClr val="FFFFFF"/>
-          </a:solidFill>
-          <a:ln w="12700">
-            <a:solidFill>
-              <a:srgbClr val="999999"/>
-            </a:solidFill>
-          </a:ln>
-        </p:spPr>
-        <p:style>
-          <a:lnRef idx="1">
-            <a:schemeClr val="accent1"/>
-          </a:lnRef>
-          <a:fillRef idx="3">
-            <a:schemeClr val="accent1"/>
-          </a:fillRef>
-          <a:effectRef idx="2">
-            <a:schemeClr val="accent1"/>
-          </a:effectRef>
-          <a:fontRef idx="minor">
-            <a:schemeClr val="lt1"/>
-          </a:fontRef>
-        </p:style>
-        <p:txBody>
-          <a:bodyPr rtlCol="0" anchor="ctr"/>
-          <a:lstStyle/>
-          <a:p>
-            <a:pPr algn="ctr"/>
-          </a:p>
-        </p:txBody>
-      </p:sp>
-      <p:sp>
-        <p:nvSpPr>
-          <p:cNvPr id="24" name="Oval 23"/>
-          <p:cNvSpPr/>
-          <p:nvPr/>
-        </p:nvSpPr>
-        <p:spPr>
-          <a:xfrm>
-            <a:off x="6475000" y="4150000"/>
-            <a:ext cx="500000" cy="500000"/>
-          </a:xfrm>
-          <a:prstGeom prst="ellipse">
-            <a:avLst/>
-          </a:prstGeom>
-          <a:solidFill>
-            <a:srgbClr val="555555"/>
-          </a:solidFill>
-          <a:ln>
-            <a:noFill/>
-          </a:ln>
-        </p:spPr>
-        <p:style>
-          <a:lnRef idx="1">
-            <a:schemeClr val="accent1"/>
-          </a:lnRef>
-          <a:fillRef idx="3">
-            <a:schemeClr val="accent1"/>
-          </a:fillRef>
-          <a:effectRef idx="2">
-            <a:schemeClr val="accent1"/>
-          </a:effectRef>
-          <a:fontRef idx="minor">
-            <a:schemeClr val="lt1"/>
-          </a:fontRef>
-        </p:style>
-        <p:txBody>
-          <a:bodyPr rtlCol="0" anchor="ctr"/>
-          <a:lstStyle/>
-          <a:p>
-            <a:pPr algn="ctr"/>
-          </a:p>
-        </p:txBody>
-      </p:sp>
-      <p:sp>
-        <p:nvSpPr>
-          <p:cNvPr id="25" name="TextBox 24"/>
-          <p:cNvSpPr txBox="1"/>
-          <p:nvPr/>
-        </p:nvSpPr>
-        <p:spPr>
-          <a:xfrm>
-            <a:off x="6475000" y="4150000"/>
-            <a:ext cx="500000" cy="500000"/>
-          </a:xfrm>
-          <a:prstGeom prst="rect">
-            <a:avLst/>
-          </a:prstGeom>
-          <a:noFill/>
-        </p:spPr>
-        <p:txBody>
-          <a:bodyPr wrap="square" anchor="ctr">
-            <a:spAutoFit/>
-          </a:bodyPr>
-          <a:lstStyle/>
-          <a:p>
-            <a:pPr algn="ctr"/>
-            <a:r>
-              <a:rPr sz="1400" b="1">
-                <a:solidFill>
-                  <a:srgbClr val="FFFFFF"/>
-                </a:solidFill>
-                <a:latin typeface="Open Sans"/>
-                <a:ea typeface="Open Sans"/>
-                <a:cs typeface="Open Sans"/>
-              </a:rPr>
-              <a:t>4</a:t>
-            </a:r>
-          </a:p>
-        </p:txBody>
-      </p:sp>
-      <p:sp>
-        <p:nvSpPr>
-          <p:cNvPr id="26" name="TextBox 25"/>
-          <p:cNvSpPr txBox="1"/>
-          <p:nvPr/>
-        </p:nvSpPr>
-        <p:spPr>
-          <a:xfrm>
-            <a:off x="7075000" y="4200000"/>
-            <a:ext cx="4475000" cy="450000"/>
-          </a:xfrm>
-          <a:prstGeom prst="rect">
-            <a:avLst/>
-          </a:prstGeom>
-          <a:noFill/>
-        </p:spPr>
-        <p:txBody>
-          <a:bodyPr wrap="square" anchor="t">
-            <a:spAutoFit/>
-          </a:bodyPr>
-          <a:lstStyle/>
-          <a:p>
-            <a:pPr algn="l"/>
-            <a:r>
-              <a:rPr sz="1300" b="1">
+              <a:t>•  раны, ожоги, деформации и болезненность</a:t>
+            </a:r>
+          </a:p>
+          <a:p>
+            <a:pPr algn="l">
+              <a:spcAft>
+                <a:spcPts val="800"/>
+              </a:spcAft>
+            </a:pPr>
+            <a:r>
+              <a:rPr sz="1300" b="0">
                 <a:solidFill>
                   <a:srgbClr val="333333"/>
                 </a:solidFill>
@@ -7237,44 +9293,25 @@
                 <a:ea typeface="Open Sans"/>
                 <a:cs typeface="Open Sans"/>
               </a:rPr>
-              <a:t>Следуйте указаниям</a:t>
-            </a:r>
-          </a:p>
-        </p:txBody>
-      </p:sp>
-      <p:sp>
-        <p:nvSpPr>
-          <p:cNvPr id="27" name="TextBox 26"/>
-          <p:cNvSpPr txBox="1"/>
-          <p:nvPr/>
-        </p:nvSpPr>
-        <p:spPr>
-          <a:xfrm>
-            <a:off x="6475000" y="4800000"/>
-            <a:ext cx="5075000" cy="1300000"/>
-          </a:xfrm>
-          <a:prstGeom prst="rect">
-            <a:avLst/>
-          </a:prstGeom>
-          <a:noFill/>
-        </p:spPr>
-        <p:txBody>
-          <a:bodyPr wrap="square" anchor="t">
-            <a:spAutoFit/>
-          </a:bodyPr>
-          <a:lstStyle/>
-          <a:p>
-            <a:pPr algn="l"/>
-            <a:r>
-              <a:rPr sz="1200" b="0">
-                <a:solidFill>
-                  <a:srgbClr val="666666"/>
-                </a:solidFill>
-                <a:latin typeface="Open Sans"/>
-                <a:ea typeface="Open Sans"/>
-                <a:cs typeface="Open Sans"/>
-              </a:rPr>
-              <a:t>Не мешайте медицинским действиям бригады.</a:t>
+              <a:t>•  признаки травмы головы, груди, живота или таза</a:t>
+            </a:r>
+          </a:p>
+          <a:p>
+            <a:pPr algn="l">
+              <a:spcAft>
+                <a:spcPts val="800"/>
+              </a:spcAft>
+            </a:pPr>
+            <a:r>
+              <a:rPr sz="1300" b="0">
+                <a:solidFill>
+                  <a:srgbClr val="333333"/>
+                </a:solidFill>
+                <a:latin typeface="Open Sans"/>
+                <a:ea typeface="Open Sans"/>
+                <a:cs typeface="Open Sans"/>
+              </a:rPr>
+              <a:t>•  изменения чувствительности и движения конечностей</a:t>
             </a:r>
           </a:p>
         </p:txBody>
@@ -7372,7 +9409,7 @@
                 <a:ea typeface="Open Sans"/>
                 <a:cs typeface="Open Sans"/>
               </a:rPr>
-              <a:t>ГЛАВНОЕ ЗАПОМНИТЬ</a:t>
+              <a:t>ПЕРЕЧИСЛИТЕ ОКАЗАННУЮ ПОМОЩЬ</a:t>
             </a:r>
           </a:p>
         </p:txBody>
@@ -7539,102 +9576,14 @@
       </p:sp>
       <p:sp>
         <p:nvSpPr>
-          <p:cNvPr id="8" name="Rectangle 7"/>
-          <p:cNvSpPr/>
+          <p:cNvPr id="8" name="TextBox 7"/>
+          <p:cNvSpPr txBox="1"/>
           <p:nvPr/>
         </p:nvSpPr>
         <p:spPr>
           <a:xfrm>
             <a:off x="700000" y="1450000"/>
-            <a:ext cx="11000000" cy="833333"/>
-          </a:xfrm>
-          <a:prstGeom prst="rect">
-            <a:avLst/>
-          </a:prstGeom>
-          <a:solidFill>
-            <a:srgbClr val="FFFFFF"/>
-          </a:solidFill>
-          <a:ln w="12700">
-            <a:solidFill>
-              <a:srgbClr val="999999"/>
-            </a:solidFill>
-          </a:ln>
-        </p:spPr>
-        <p:style>
-          <a:lnRef idx="1">
-            <a:schemeClr val="accent1"/>
-          </a:lnRef>
-          <a:fillRef idx="3">
-            <a:schemeClr val="accent1"/>
-          </a:fillRef>
-          <a:effectRef idx="2">
-            <a:schemeClr val="accent1"/>
-          </a:effectRef>
-          <a:fontRef idx="minor">
-            <a:schemeClr val="lt1"/>
-          </a:fontRef>
-        </p:style>
-        <p:txBody>
-          <a:bodyPr rtlCol="0" anchor="ctr"/>
-          <a:lstStyle/>
-          <a:p>
-            <a:pPr algn="ctr"/>
-          </a:p>
-        </p:txBody>
-      </p:sp>
-      <p:sp>
-        <p:nvSpPr>
-          <p:cNvPr id="9" name="Rectangle 8"/>
-          <p:cNvSpPr/>
-          <p:nvPr/>
-        </p:nvSpPr>
-        <p:spPr>
-          <a:xfrm>
-            <a:off x="700000" y="1450000"/>
-            <a:ext cx="90000" cy="833333"/>
-          </a:xfrm>
-          <a:prstGeom prst="rect">
-            <a:avLst/>
-          </a:prstGeom>
-          <a:solidFill>
-            <a:srgbClr val="CC0000"/>
-          </a:solidFill>
-          <a:ln>
-            <a:noFill/>
-          </a:ln>
-        </p:spPr>
-        <p:style>
-          <a:lnRef idx="1">
-            <a:schemeClr val="accent1"/>
-          </a:lnRef>
-          <a:fillRef idx="3">
-            <a:schemeClr val="accent1"/>
-          </a:fillRef>
-          <a:effectRef idx="2">
-            <a:schemeClr val="accent1"/>
-          </a:effectRef>
-          <a:fontRef idx="minor">
-            <a:schemeClr val="lt1"/>
-          </a:fontRef>
-        </p:style>
-        <p:txBody>
-          <a:bodyPr rtlCol="0" anchor="ctr"/>
-          <a:lstStyle/>
-          <a:p>
-            <a:pPr algn="ctr"/>
-          </a:p>
-        </p:txBody>
-      </p:sp>
-      <p:sp>
-        <p:nvSpPr>
-          <p:cNvPr id="10" name="TextBox 9"/>
-          <p:cNvSpPr txBox="1"/>
-          <p:nvPr/>
-        </p:nvSpPr>
-        <p:spPr>
-          <a:xfrm>
-            <a:off x="1000000" y="1550000"/>
-            <a:ext cx="10400000" cy="633333"/>
+            <a:ext cx="11000000" cy="4000000"/>
           </a:xfrm>
           <a:prstGeom prst="rect">
             <a:avLst/>
@@ -7642,14 +9591,18 @@
           <a:noFill/>
         </p:spPr>
         <p:txBody>
-          <a:bodyPr wrap="square" anchor="ctr">
+          <a:bodyPr wrap="square">
             <a:spAutoFit/>
           </a:bodyPr>
           <a:lstStyle/>
           <a:p>
-            <a:pPr algn="l"/>
-            <a:r>
-              <a:rPr sz="1300" b="0">
+            <a:pPr algn="l">
+              <a:spcAft>
+                <a:spcPts val="800"/>
+              </a:spcAft>
+            </a:pPr>
+            <a:r>
+              <a:rPr sz="1400" b="0">
                 <a:solidFill>
                   <a:srgbClr val="333333"/>
                 </a:solidFill>
@@ -7657,124 +9610,17 @@
                 <a:ea typeface="Open Sans"/>
                 <a:cs typeface="Open Sans"/>
               </a:rPr>
-              <a:t>Передавайте после устного распоряжения</a:t>
-            </a:r>
-          </a:p>
-        </p:txBody>
-      </p:sp>
-      <p:sp>
-        <p:nvSpPr>
-          <p:cNvPr id="11" name="Rectangle 10"/>
-          <p:cNvSpPr/>
-          <p:nvPr/>
-        </p:nvSpPr>
-        <p:spPr>
-          <a:xfrm>
-            <a:off x="700000" y="2383333"/>
-            <a:ext cx="11000000" cy="833333"/>
-          </a:xfrm>
-          <a:prstGeom prst="rect">
-            <a:avLst/>
-          </a:prstGeom>
-          <a:solidFill>
-            <a:srgbClr val="FFFFFF"/>
-          </a:solidFill>
-          <a:ln w="12700">
-            <a:solidFill>
-              <a:srgbClr val="999999"/>
-            </a:solidFill>
-          </a:ln>
-        </p:spPr>
-        <p:style>
-          <a:lnRef idx="1">
-            <a:schemeClr val="accent1"/>
-          </a:lnRef>
-          <a:fillRef idx="3">
-            <a:schemeClr val="accent1"/>
-          </a:fillRef>
-          <a:effectRef idx="2">
-            <a:schemeClr val="accent1"/>
-          </a:effectRef>
-          <a:fontRef idx="minor">
-            <a:schemeClr val="lt1"/>
-          </a:fontRef>
-        </p:style>
-        <p:txBody>
-          <a:bodyPr rtlCol="0" anchor="ctr"/>
-          <a:lstStyle/>
-          <a:p>
-            <a:pPr algn="ctr"/>
-          </a:p>
-        </p:txBody>
-      </p:sp>
-      <p:sp>
-        <p:nvSpPr>
-          <p:cNvPr id="12" name="Rectangle 11"/>
-          <p:cNvSpPr/>
-          <p:nvPr/>
-        </p:nvSpPr>
-        <p:spPr>
-          <a:xfrm>
-            <a:off x="700000" y="2383333"/>
-            <a:ext cx="90000" cy="833333"/>
-          </a:xfrm>
-          <a:prstGeom prst="rect">
-            <a:avLst/>
-          </a:prstGeom>
-          <a:solidFill>
-            <a:srgbClr val="CC0000"/>
-          </a:solidFill>
-          <a:ln>
-            <a:noFill/>
-          </a:ln>
-        </p:spPr>
-        <p:style>
-          <a:lnRef idx="1">
-            <a:schemeClr val="accent1"/>
-          </a:lnRef>
-          <a:fillRef idx="3">
-            <a:schemeClr val="accent1"/>
-          </a:fillRef>
-          <a:effectRef idx="2">
-            <a:schemeClr val="accent1"/>
-          </a:effectRef>
-          <a:fontRef idx="minor">
-            <a:schemeClr val="lt1"/>
-          </a:fontRef>
-        </p:style>
-        <p:txBody>
-          <a:bodyPr rtlCol="0" anchor="ctr"/>
-          <a:lstStyle/>
-          <a:p>
-            <a:pPr algn="ctr"/>
-          </a:p>
-        </p:txBody>
-      </p:sp>
-      <p:sp>
-        <p:nvSpPr>
-          <p:cNvPr id="13" name="TextBox 12"/>
-          <p:cNvSpPr txBox="1"/>
-          <p:nvPr/>
-        </p:nvSpPr>
-        <p:spPr>
-          <a:xfrm>
-            <a:off x="1000000" y="2483333"/>
-            <a:ext cx="10400000" cy="633333"/>
-          </a:xfrm>
-          <a:prstGeom prst="rect">
-            <a:avLst/>
-          </a:prstGeom>
-          <a:noFill/>
-        </p:spPr>
-        <p:txBody>
-          <a:bodyPr wrap="square" anchor="ctr">
-            <a:spAutoFit/>
-          </a:bodyPr>
-          <a:lstStyle/>
-          <a:p>
-            <a:pPr algn="l"/>
-            <a:r>
-              <a:rPr sz="1300" b="0">
+              <a:t>•  Каким способом и когда остановили кровотечение.</a:t>
+            </a:r>
+          </a:p>
+          <a:p>
+            <a:pPr algn="l">
+              <a:spcAft>
+                <a:spcPts val="800"/>
+              </a:spcAft>
+            </a:pPr>
+            <a:r>
+              <a:rPr sz="1400" b="0">
                 <a:solidFill>
                   <a:srgbClr val="333333"/>
                 </a:solidFill>
@@ -7782,124 +9628,17 @@
                 <a:ea typeface="Open Sans"/>
                 <a:cs typeface="Open Sans"/>
               </a:rPr>
-              <a:t>Расскажите, что произошло</a:t>
-            </a:r>
-          </a:p>
-        </p:txBody>
-      </p:sp>
-      <p:sp>
-        <p:nvSpPr>
-          <p:cNvPr id="14" name="Rectangle 13"/>
-          <p:cNvSpPr/>
-          <p:nvPr/>
-        </p:nvSpPr>
-        <p:spPr>
-          <a:xfrm>
-            <a:off x="700000" y="3316666"/>
-            <a:ext cx="11000000" cy="833333"/>
-          </a:xfrm>
-          <a:prstGeom prst="rect">
-            <a:avLst/>
-          </a:prstGeom>
-          <a:solidFill>
-            <a:srgbClr val="FFFFFF"/>
-          </a:solidFill>
-          <a:ln w="12700">
-            <a:solidFill>
-              <a:srgbClr val="999999"/>
-            </a:solidFill>
-          </a:ln>
-        </p:spPr>
-        <p:style>
-          <a:lnRef idx="1">
-            <a:schemeClr val="accent1"/>
-          </a:lnRef>
-          <a:fillRef idx="3">
-            <a:schemeClr val="accent1"/>
-          </a:fillRef>
-          <a:effectRef idx="2">
-            <a:schemeClr val="accent1"/>
-          </a:effectRef>
-          <a:fontRef idx="minor">
-            <a:schemeClr val="lt1"/>
-          </a:fontRef>
-        </p:style>
-        <p:txBody>
-          <a:bodyPr rtlCol="0" anchor="ctr"/>
-          <a:lstStyle/>
-          <a:p>
-            <a:pPr algn="ctr"/>
-          </a:p>
-        </p:txBody>
-      </p:sp>
-      <p:sp>
-        <p:nvSpPr>
-          <p:cNvPr id="15" name="Rectangle 14"/>
-          <p:cNvSpPr/>
-          <p:nvPr/>
-        </p:nvSpPr>
-        <p:spPr>
-          <a:xfrm>
-            <a:off x="700000" y="3316666"/>
-            <a:ext cx="90000" cy="833333"/>
-          </a:xfrm>
-          <a:prstGeom prst="rect">
-            <a:avLst/>
-          </a:prstGeom>
-          <a:solidFill>
-            <a:srgbClr val="CC0000"/>
-          </a:solidFill>
-          <a:ln>
-            <a:noFill/>
-          </a:ln>
-        </p:spPr>
-        <p:style>
-          <a:lnRef idx="1">
-            <a:schemeClr val="accent1"/>
-          </a:lnRef>
-          <a:fillRef idx="3">
-            <a:schemeClr val="accent1"/>
-          </a:fillRef>
-          <a:effectRef idx="2">
-            <a:schemeClr val="accent1"/>
-          </a:effectRef>
-          <a:fontRef idx="minor">
-            <a:schemeClr val="lt1"/>
-          </a:fontRef>
-        </p:style>
-        <p:txBody>
-          <a:bodyPr rtlCol="0" anchor="ctr"/>
-          <a:lstStyle/>
-          <a:p>
-            <a:pPr algn="ctr"/>
-          </a:p>
-        </p:txBody>
-      </p:sp>
-      <p:sp>
-        <p:nvSpPr>
-          <p:cNvPr id="16" name="TextBox 15"/>
-          <p:cNvSpPr txBox="1"/>
-          <p:nvPr/>
-        </p:nvSpPr>
-        <p:spPr>
-          <a:xfrm>
-            <a:off x="1000000" y="3416666"/>
-            <a:ext cx="10400000" cy="633333"/>
-          </a:xfrm>
-          <a:prstGeom prst="rect">
-            <a:avLst/>
-          </a:prstGeom>
-          <a:noFill/>
-        </p:spPr>
-        <p:txBody>
-          <a:bodyPr wrap="square" anchor="ctr">
-            <a:spAutoFit/>
-          </a:bodyPr>
-          <a:lstStyle/>
-          <a:p>
-            <a:pPr algn="l"/>
-            <a:r>
-              <a:rPr sz="1300" b="0">
+              <a:t>•  Какие раны закрыли и какие повязки наложили.</a:t>
+            </a:r>
+          </a:p>
+          <a:p>
+            <a:pPr algn="l">
+              <a:spcAft>
+                <a:spcPts val="800"/>
+              </a:spcAft>
+            </a:pPr>
+            <a:r>
+              <a:rPr sz="1400" b="0">
                 <a:solidFill>
                   <a:srgbClr val="333333"/>
                 </a:solidFill>
@@ -7907,124 +9646,17 @@
                 <a:ea typeface="Open Sans"/>
                 <a:cs typeface="Open Sans"/>
               </a:rPr>
-              <a:t>Назовите найденные травмы</a:t>
-            </a:r>
-          </a:p>
-        </p:txBody>
-      </p:sp>
-      <p:sp>
-        <p:nvSpPr>
-          <p:cNvPr id="17" name="Rectangle 16"/>
-          <p:cNvSpPr/>
-          <p:nvPr/>
-        </p:nvSpPr>
-        <p:spPr>
-          <a:xfrm>
-            <a:off x="700000" y="4249999"/>
-            <a:ext cx="11000000" cy="833333"/>
-          </a:xfrm>
-          <a:prstGeom prst="rect">
-            <a:avLst/>
-          </a:prstGeom>
-          <a:solidFill>
-            <a:srgbClr val="FFFFFF"/>
-          </a:solidFill>
-          <a:ln w="12700">
-            <a:solidFill>
-              <a:srgbClr val="999999"/>
-            </a:solidFill>
-          </a:ln>
-        </p:spPr>
-        <p:style>
-          <a:lnRef idx="1">
-            <a:schemeClr val="accent1"/>
-          </a:lnRef>
-          <a:fillRef idx="3">
-            <a:schemeClr val="accent1"/>
-          </a:fillRef>
-          <a:effectRef idx="2">
-            <a:schemeClr val="accent1"/>
-          </a:effectRef>
-          <a:fontRef idx="minor">
-            <a:schemeClr val="lt1"/>
-          </a:fontRef>
-        </p:style>
-        <p:txBody>
-          <a:bodyPr rtlCol="0" anchor="ctr"/>
-          <a:lstStyle/>
-          <a:p>
-            <a:pPr algn="ctr"/>
-          </a:p>
-        </p:txBody>
-      </p:sp>
-      <p:sp>
-        <p:nvSpPr>
-          <p:cNvPr id="18" name="Rectangle 17"/>
-          <p:cNvSpPr/>
-          <p:nvPr/>
-        </p:nvSpPr>
-        <p:spPr>
-          <a:xfrm>
-            <a:off x="700000" y="4249999"/>
-            <a:ext cx="90000" cy="833333"/>
-          </a:xfrm>
-          <a:prstGeom prst="rect">
-            <a:avLst/>
-          </a:prstGeom>
-          <a:solidFill>
-            <a:srgbClr val="CC0000"/>
-          </a:solidFill>
-          <a:ln>
-            <a:noFill/>
-          </a:ln>
-        </p:spPr>
-        <p:style>
-          <a:lnRef idx="1">
-            <a:schemeClr val="accent1"/>
-          </a:lnRef>
-          <a:fillRef idx="3">
-            <a:schemeClr val="accent1"/>
-          </a:fillRef>
-          <a:effectRef idx="2">
-            <a:schemeClr val="accent1"/>
-          </a:effectRef>
-          <a:fontRef idx="minor">
-            <a:schemeClr val="lt1"/>
-          </a:fontRef>
-        </p:style>
-        <p:txBody>
-          <a:bodyPr rtlCol="0" anchor="ctr"/>
-          <a:lstStyle/>
-          <a:p>
-            <a:pPr algn="ctr"/>
-          </a:p>
-        </p:txBody>
-      </p:sp>
-      <p:sp>
-        <p:nvSpPr>
-          <p:cNvPr id="19" name="TextBox 18"/>
-          <p:cNvSpPr txBox="1"/>
-          <p:nvPr/>
-        </p:nvSpPr>
-        <p:spPr>
-          <a:xfrm>
-            <a:off x="1000000" y="4349999"/>
-            <a:ext cx="10400000" cy="633333"/>
-          </a:xfrm>
-          <a:prstGeom prst="rect">
-            <a:avLst/>
-          </a:prstGeom>
-          <a:noFill/>
-        </p:spPr>
-        <p:txBody>
-          <a:bodyPr wrap="square" anchor="ctr">
-            <a:spAutoFit/>
-          </a:bodyPr>
-          <a:lstStyle/>
-          <a:p>
-            <a:pPr algn="l"/>
-            <a:r>
-              <a:rPr sz="1300" b="0">
+              <a:t>•  Какие конечности обездвижили и как изменилось их состояние.</a:t>
+            </a:r>
+          </a:p>
+          <a:p>
+            <a:pPr algn="l">
+              <a:spcAft>
+                <a:spcPts val="800"/>
+              </a:spcAft>
+            </a:pPr>
+            <a:r>
+              <a:rPr sz="1400" b="0">
                 <a:solidFill>
                   <a:srgbClr val="333333"/>
                 </a:solidFill>
@@ -8032,124 +9664,17 @@
                 <a:ea typeface="Open Sans"/>
                 <a:cs typeface="Open Sans"/>
               </a:rPr>
-              <a:t>Перечислите оказанную помощь</a:t>
-            </a:r>
-          </a:p>
-        </p:txBody>
-      </p:sp>
-      <p:sp>
-        <p:nvSpPr>
-          <p:cNvPr id="20" name="Rectangle 19"/>
-          <p:cNvSpPr/>
-          <p:nvPr/>
-        </p:nvSpPr>
-        <p:spPr>
-          <a:xfrm>
-            <a:off x="700000" y="5183332"/>
-            <a:ext cx="11000000" cy="833333"/>
-          </a:xfrm>
-          <a:prstGeom prst="rect">
-            <a:avLst/>
-          </a:prstGeom>
-          <a:solidFill>
-            <a:srgbClr val="FFFFFF"/>
-          </a:solidFill>
-          <a:ln w="12700">
-            <a:solidFill>
-              <a:srgbClr val="999999"/>
-            </a:solidFill>
-          </a:ln>
-        </p:spPr>
-        <p:style>
-          <a:lnRef idx="1">
-            <a:schemeClr val="accent1"/>
-          </a:lnRef>
-          <a:fillRef idx="3">
-            <a:schemeClr val="accent1"/>
-          </a:fillRef>
-          <a:effectRef idx="2">
-            <a:schemeClr val="accent1"/>
-          </a:effectRef>
-          <a:fontRef idx="minor">
-            <a:schemeClr val="lt1"/>
-          </a:fontRef>
-        </p:style>
-        <p:txBody>
-          <a:bodyPr rtlCol="0" anchor="ctr"/>
-          <a:lstStyle/>
-          <a:p>
-            <a:pPr algn="ctr"/>
-          </a:p>
-        </p:txBody>
-      </p:sp>
-      <p:sp>
-        <p:nvSpPr>
-          <p:cNvPr id="21" name="Rectangle 20"/>
-          <p:cNvSpPr/>
-          <p:nvPr/>
-        </p:nvSpPr>
-        <p:spPr>
-          <a:xfrm>
-            <a:off x="700000" y="5183332"/>
-            <a:ext cx="90000" cy="833333"/>
-          </a:xfrm>
-          <a:prstGeom prst="rect">
-            <a:avLst/>
-          </a:prstGeom>
-          <a:solidFill>
-            <a:srgbClr val="CC0000"/>
-          </a:solidFill>
-          <a:ln>
-            <a:noFill/>
-          </a:ln>
-        </p:spPr>
-        <p:style>
-          <a:lnRef idx="1">
-            <a:schemeClr val="accent1"/>
-          </a:lnRef>
-          <a:fillRef idx="3">
-            <a:schemeClr val="accent1"/>
-          </a:fillRef>
-          <a:effectRef idx="2">
-            <a:schemeClr val="accent1"/>
-          </a:effectRef>
-          <a:fontRef idx="minor">
-            <a:schemeClr val="lt1"/>
-          </a:fontRef>
-        </p:style>
-        <p:txBody>
-          <a:bodyPr rtlCol="0" anchor="ctr"/>
-          <a:lstStyle/>
-          <a:p>
-            <a:pPr algn="ctr"/>
-          </a:p>
-        </p:txBody>
-      </p:sp>
-      <p:sp>
-        <p:nvSpPr>
-          <p:cNvPr id="22" name="TextBox 21"/>
-          <p:cNvSpPr txBox="1"/>
-          <p:nvPr/>
-        </p:nvSpPr>
-        <p:spPr>
-          <a:xfrm>
-            <a:off x="1000000" y="5283332"/>
-            <a:ext cx="10400000" cy="633333"/>
-          </a:xfrm>
-          <a:prstGeom prst="rect">
-            <a:avLst/>
-          </a:prstGeom>
-          <a:noFill/>
-        </p:spPr>
-        <p:txBody>
-          <a:bodyPr wrap="square" anchor="ctr">
-            <a:spAutoFit/>
-          </a:bodyPr>
-          <a:lstStyle/>
-          <a:p>
-            <a:pPr algn="l"/>
-            <a:r>
-              <a:rPr sz="1300" b="0">
+              <a:t>•  Проводилась ли сердечно-легочная реанимация и сколько времени.</a:t>
+            </a:r>
+          </a:p>
+          <a:p>
+            <a:pPr algn="l">
+              <a:spcAft>
+                <a:spcPts val="800"/>
+              </a:spcAft>
+            </a:pPr>
+            <a:r>
+              <a:rPr sz="1400" b="0">
                 <a:solidFill>
                   <a:srgbClr val="333333"/>
                 </a:solidFill>
@@ -8157,124 +9682,17 @@
                 <a:ea typeface="Open Sans"/>
                 <a:cs typeface="Open Sans"/>
               </a:rPr>
-              <a:t>Сообщите об изменениях состояния</a:t>
-            </a:r>
-          </a:p>
-        </p:txBody>
-      </p:sp>
-      <p:sp>
-        <p:nvSpPr>
-          <p:cNvPr id="23" name="Rectangle 22"/>
-          <p:cNvSpPr/>
-          <p:nvPr/>
-        </p:nvSpPr>
-        <p:spPr>
-          <a:xfrm>
-            <a:off x="700000" y="6116665"/>
-            <a:ext cx="11000000" cy="833333"/>
-          </a:xfrm>
-          <a:prstGeom prst="rect">
-            <a:avLst/>
-          </a:prstGeom>
-          <a:solidFill>
-            <a:srgbClr val="FFFFFF"/>
-          </a:solidFill>
-          <a:ln w="12700">
-            <a:solidFill>
-              <a:srgbClr val="999999"/>
-            </a:solidFill>
-          </a:ln>
-        </p:spPr>
-        <p:style>
-          <a:lnRef idx="1">
-            <a:schemeClr val="accent1"/>
-          </a:lnRef>
-          <a:fillRef idx="3">
-            <a:schemeClr val="accent1"/>
-          </a:fillRef>
-          <a:effectRef idx="2">
-            <a:schemeClr val="accent1"/>
-          </a:effectRef>
-          <a:fontRef idx="minor">
-            <a:schemeClr val="lt1"/>
-          </a:fontRef>
-        </p:style>
-        <p:txBody>
-          <a:bodyPr rtlCol="0" anchor="ctr"/>
-          <a:lstStyle/>
-          <a:p>
-            <a:pPr algn="ctr"/>
-          </a:p>
-        </p:txBody>
-      </p:sp>
-      <p:sp>
-        <p:nvSpPr>
-          <p:cNvPr id="24" name="Rectangle 23"/>
-          <p:cNvSpPr/>
-          <p:nvPr/>
-        </p:nvSpPr>
-        <p:spPr>
-          <a:xfrm>
-            <a:off x="700000" y="6116665"/>
-            <a:ext cx="90000" cy="833333"/>
-          </a:xfrm>
-          <a:prstGeom prst="rect">
-            <a:avLst/>
-          </a:prstGeom>
-          <a:solidFill>
-            <a:srgbClr val="CC0000"/>
-          </a:solidFill>
-          <a:ln>
-            <a:noFill/>
-          </a:ln>
-        </p:spPr>
-        <p:style>
-          <a:lnRef idx="1">
-            <a:schemeClr val="accent1"/>
-          </a:lnRef>
-          <a:fillRef idx="3">
-            <a:schemeClr val="accent1"/>
-          </a:fillRef>
-          <a:effectRef idx="2">
-            <a:schemeClr val="accent1"/>
-          </a:effectRef>
-          <a:fontRef idx="minor">
-            <a:schemeClr val="lt1"/>
-          </a:fontRef>
-        </p:style>
-        <p:txBody>
-          <a:bodyPr rtlCol="0" anchor="ctr"/>
-          <a:lstStyle/>
-          <a:p>
-            <a:pPr algn="ctr"/>
-          </a:p>
-        </p:txBody>
-      </p:sp>
-      <p:sp>
-        <p:nvSpPr>
-          <p:cNvPr id="25" name="TextBox 24"/>
-          <p:cNvSpPr txBox="1"/>
-          <p:nvPr/>
-        </p:nvSpPr>
-        <p:spPr>
-          <a:xfrm>
-            <a:off x="1000000" y="6216665"/>
-            <a:ext cx="10400000" cy="633333"/>
-          </a:xfrm>
-          <a:prstGeom prst="rect">
-            <a:avLst/>
-          </a:prstGeom>
-          <a:noFill/>
-        </p:spPr>
-        <p:txBody>
-          <a:bodyPr wrap="square" anchor="ctr">
-            <a:spAutoFit/>
-          </a:bodyPr>
-          <a:lstStyle/>
-          <a:p>
-            <a:pPr algn="l"/>
-            <a:r>
-              <a:rPr sz="1300" b="0">
+              <a:t>•  В каком положении находился пострадавший и почему.</a:t>
+            </a:r>
+          </a:p>
+          <a:p>
+            <a:pPr algn="l">
+              <a:spcAft>
+                <a:spcPts val="800"/>
+              </a:spcAft>
+            </a:pPr>
+            <a:r>
+              <a:rPr sz="1400" b="0">
                 <a:solidFill>
                   <a:srgbClr val="333333"/>
                 </a:solidFill>
@@ -8282,7 +9700,7 @@
                 <a:ea typeface="Open Sans"/>
                 <a:cs typeface="Open Sans"/>
               </a:rPr>
-              <a:t>Помогите перенести по просьбе бригады</a:t>
+              <a:t>•  Какое собственное назначенное лекарство он принял, в какой дозе и когда.</a:t>
             </a:r>
           </a:p>
         </p:txBody>
@@ -8380,7 +9798,7 @@
                 <a:ea typeface="Open Sans"/>
                 <a:cs typeface="Open Sans"/>
               </a:rPr>
-              <a:t>ПАМЯТКА</a:t>
+              <a:t>ОБЯЗАТЕЛЬНО НАЗОВИТЕ ИЗМЕНЕНИЯ</a:t>
             </a:r>
           </a:p>
         </p:txBody>
@@ -8545,30 +9963,217 @@
           </a:p>
         </p:txBody>
       </p:sp>
-      <p:pic>
-        <p:nvPicPr>
-          <p:cNvPr id="8" name="Picture 7" descr="pamyatka-tema4-peredacha-smp-16x9.png"/>
-          <p:cNvPicPr>
-            <a:picLocks noChangeAspect="1"/>
-          </p:cNvPicPr>
-          <p:nvPr/>
-        </p:nvPicPr>
-        <p:blipFill>
-          <a:blip r:embed="rId2"/>
-          <a:stretch>
-            <a:fillRect/>
-          </a:stretch>
-        </p:blipFill>
-        <p:spPr>
-          <a:xfrm>
-            <a:off x="2300000" y="1400000"/>
-            <a:ext cx="7800000" cy="5200000"/>
-          </a:xfrm>
-          <a:prstGeom prst="rect">
-            <a:avLst/>
-          </a:prstGeom>
-        </p:spPr>
-      </p:pic>
+      <p:sp>
+        <p:nvSpPr>
+          <p:cNvPr id="8" name="TextBox 7"/>
+          <p:cNvSpPr txBox="1"/>
+          <p:nvPr/>
+        </p:nvSpPr>
+        <p:spPr>
+          <a:xfrm>
+            <a:off x="700000" y="1450000"/>
+            <a:ext cx="11000000" cy="4000000"/>
+          </a:xfrm>
+          <a:prstGeom prst="rect">
+            <a:avLst/>
+          </a:prstGeom>
+          <a:noFill/>
+        </p:spPr>
+        <p:txBody>
+          <a:bodyPr wrap="square">
+            <a:spAutoFit/>
+          </a:bodyPr>
+          <a:lstStyle/>
+          <a:p>
+            <a:pPr algn="l">
+              <a:spcAft>
+                <a:spcPts val="800"/>
+              </a:spcAft>
+            </a:pPr>
+            <a:r>
+              <a:rPr sz="1400" b="1">
+                <a:solidFill>
+                  <a:srgbClr val="CC0000"/>
+                </a:solidFill>
+                <a:latin typeface="Open Sans"/>
+                <a:ea typeface="Open Sans"/>
+                <a:cs typeface="Open Sans"/>
+              </a:rPr>
+              <a:t>•  Потеря или восстановление сознания</a:t>
+            </a:r>
+          </a:p>
+          <a:p>
+            <a:pPr algn="l">
+              <a:spcAft>
+                <a:spcPts val="800"/>
+              </a:spcAft>
+            </a:pPr>
+            <a:r>
+              <a:rPr sz="1400" b="1">
+                <a:solidFill>
+                  <a:srgbClr val="CC0000"/>
+                </a:solidFill>
+                <a:latin typeface="Open Sans"/>
+                <a:ea typeface="Open Sans"/>
+                <a:cs typeface="Open Sans"/>
+              </a:rPr>
+              <a:t>•  Изменение частоты, глубины или характера дыхания</a:t>
+            </a:r>
+          </a:p>
+          <a:p>
+            <a:pPr algn="l">
+              <a:spcAft>
+                <a:spcPts val="800"/>
+              </a:spcAft>
+            </a:pPr>
+            <a:r>
+              <a:rPr sz="1400" b="1">
+                <a:solidFill>
+                  <a:srgbClr val="CC0000"/>
+                </a:solidFill>
+                <a:latin typeface="Open Sans"/>
+                <a:ea typeface="Open Sans"/>
+                <a:cs typeface="Open Sans"/>
+              </a:rPr>
+              <a:t>•  Возобновление кровотечения или пропитывание повязки</a:t>
+            </a:r>
+          </a:p>
+          <a:p>
+            <a:pPr algn="l">
+              <a:spcAft>
+                <a:spcPts val="800"/>
+              </a:spcAft>
+            </a:pPr>
+            <a:r>
+              <a:rPr sz="1400" b="0">
+                <a:solidFill>
+                  <a:srgbClr val="333333"/>
+                </a:solidFill>
+                <a:latin typeface="Open Sans"/>
+                <a:ea typeface="Open Sans"/>
+                <a:cs typeface="Open Sans"/>
+              </a:rPr>
+              <a:t>•  Нарастание боли, слабости, одышки, отека или синюшности</a:t>
+            </a:r>
+          </a:p>
+          <a:p>
+            <a:pPr algn="l">
+              <a:spcAft>
+                <a:spcPts val="800"/>
+              </a:spcAft>
+            </a:pPr>
+            <a:r>
+              <a:rPr sz="1400" b="0">
+                <a:solidFill>
+                  <a:srgbClr val="333333"/>
+                </a:solidFill>
+                <a:latin typeface="Open Sans"/>
+                <a:ea typeface="Open Sans"/>
+                <a:cs typeface="Open Sans"/>
+              </a:rPr>
+              <a:t>•  Повторные судороги, рвота или новая жалоба</a:t>
+            </a:r>
+          </a:p>
+          <a:p>
+            <a:pPr algn="l">
+              <a:spcAft>
+                <a:spcPts val="800"/>
+              </a:spcAft>
+            </a:pPr>
+            <a:r>
+              <a:rPr sz="1400" b="1">
+                <a:solidFill>
+                  <a:srgbClr val="CC0000"/>
+                </a:solidFill>
+                <a:latin typeface="Open Sans"/>
+                <a:ea typeface="Open Sans"/>
+                <a:cs typeface="Open Sans"/>
+              </a:rPr>
+              <a:t>•  Точное время наложения жгута и приема лекарства</a:t>
+            </a:r>
+          </a:p>
+        </p:txBody>
+      </p:sp>
+      <p:sp>
+        <p:nvSpPr>
+          <p:cNvPr id="9" name="Rounded Rectangle 8"/>
+          <p:cNvSpPr/>
+          <p:nvPr/>
+        </p:nvSpPr>
+        <p:spPr>
+          <a:xfrm>
+            <a:off x="700000" y="5600000"/>
+            <a:ext cx="11000000" cy="1000000"/>
+          </a:xfrm>
+          <a:prstGeom prst="roundRect">
+            <a:avLst/>
+          </a:prstGeom>
+          <a:solidFill>
+            <a:srgbClr val="F5F0E1"/>
+          </a:solidFill>
+          <a:ln>
+            <a:noFill/>
+          </a:ln>
+        </p:spPr>
+        <p:style>
+          <a:lnRef idx="1">
+            <a:schemeClr val="accent1"/>
+          </a:lnRef>
+          <a:fillRef idx="3">
+            <a:schemeClr val="accent1"/>
+          </a:fillRef>
+          <a:effectRef idx="2">
+            <a:schemeClr val="accent1"/>
+          </a:effectRef>
+          <a:fontRef idx="minor">
+            <a:schemeClr val="lt1"/>
+          </a:fontRef>
+        </p:style>
+        <p:txBody>
+          <a:bodyPr rtlCol="0" anchor="ctr"/>
+          <a:lstStyle/>
+          <a:p>
+            <a:pPr algn="ctr"/>
+          </a:p>
+        </p:txBody>
+      </p:sp>
+      <p:sp>
+        <p:nvSpPr>
+          <p:cNvPr id="10" name="TextBox 9"/>
+          <p:cNvSpPr txBox="1"/>
+          <p:nvPr/>
+        </p:nvSpPr>
+        <p:spPr>
+          <a:xfrm>
+            <a:off x="950000" y="5800000"/>
+            <a:ext cx="10500000" cy="600000"/>
+          </a:xfrm>
+          <a:prstGeom prst="rect">
+            <a:avLst/>
+          </a:prstGeom>
+          <a:noFill/>
+        </p:spPr>
+        <p:txBody>
+          <a:bodyPr wrap="square" anchor="ctr">
+            <a:spAutoFit/>
+          </a:bodyPr>
+          <a:lstStyle/>
+          <a:p>
+            <a:pPr algn="l"/>
+            <a:r>
+              <a:rPr sz="1200" b="0">
+                <a:solidFill>
+                  <a:srgbClr val="333333"/>
+                </a:solidFill>
+                <a:latin typeface="Open Sans"/>
+                <a:ea typeface="Open Sans"/>
+                <a:cs typeface="Open Sans"/>
+              </a:rPr>
+              <a:t>Динамика состояния помогает бригаде оценить срочность и эффект выполненных действий.</a:t>
+            </a:r>
+          </a:p>
+        </p:txBody>
+      </p:sp>
     </p:spTree>
   </p:cSld>
   <p:clrMapOvr>
@@ -8596,13 +10201,13 @@
         <p:spPr>
           <a:xfrm>
             <a:off x="0" y="0"/>
-            <a:ext cx="3400000" cy="6858000"/>
+            <a:ext cx="12191695" cy="6858000"/>
           </a:xfrm>
           <a:prstGeom prst="rect">
             <a:avLst/>
           </a:prstGeom>
           <a:solidFill>
-            <a:srgbClr val="DDDDDD"/>
+            <a:srgbClr val="FFFFFF"/>
           </a:solidFill>
           <a:ln>
             <a:noFill/>
@@ -8632,20 +10237,57 @@
       </p:sp>
       <p:sp>
         <p:nvSpPr>
-          <p:cNvPr id="3" name="Rectangle 2"/>
+          <p:cNvPr id="3" name="TextBox 2"/>
+          <p:cNvSpPr txBox="1"/>
+          <p:nvPr/>
+        </p:nvSpPr>
+        <p:spPr>
+          <a:xfrm>
+            <a:off x="700000" y="250000"/>
+            <a:ext cx="11200000" cy="550000"/>
+          </a:xfrm>
+          <a:prstGeom prst="rect">
+            <a:avLst/>
+          </a:prstGeom>
+          <a:noFill/>
+        </p:spPr>
+        <p:txBody>
+          <a:bodyPr wrap="square" anchor="t">
+            <a:spAutoFit/>
+          </a:bodyPr>
+          <a:lstStyle/>
+          <a:p>
+            <a:pPr algn="l"/>
+            <a:r>
+              <a:rPr sz="2200" b="1">
+                <a:solidFill>
+                  <a:srgbClr val="333333"/>
+                </a:solidFill>
+                <a:latin typeface="Open Sans"/>
+                <a:ea typeface="Open Sans"/>
+                <a:cs typeface="Open Sans"/>
+              </a:rPr>
+              <a:t>ОТВЕЧАЙТЕ ТОЧНО И КРАТКО</a:t>
+            </a:r>
+          </a:p>
+        </p:txBody>
+      </p:sp>
+      <p:sp>
+        <p:nvSpPr>
+          <p:cNvPr id="4" name="Rectangle 3"/>
           <p:cNvSpPr/>
           <p:nvPr/>
         </p:nvSpPr>
         <p:spPr>
           <a:xfrm>
-            <a:off x="3400000" y="0"/>
-            <a:ext cx="8800000" cy="6858000"/>
+            <a:off x="700000" y="850000"/>
+            <a:ext cx="9000000" cy="28000"/>
           </a:xfrm>
           <a:prstGeom prst="rect">
             <a:avLst/>
           </a:prstGeom>
           <a:solidFill>
-            <a:srgbClr val="F8F8F8"/>
+            <a:srgbClr val="555555"/>
           </a:solidFill>
           <a:ln>
             <a:noFill/>
@@ -8675,14 +10317,14 @@
       </p:sp>
       <p:sp>
         <p:nvSpPr>
-          <p:cNvPr id="4" name="TextBox 3"/>
+          <p:cNvPr id="5" name="TextBox 4"/>
           <p:cNvSpPr txBox="1"/>
           <p:nvPr/>
         </p:nvSpPr>
         <p:spPr>
           <a:xfrm>
-            <a:off x="4000000" y="3000000"/>
-            <a:ext cx="7500000" cy="1000000"/>
+            <a:off x="700000" y="920000"/>
+            <a:ext cx="11000000" cy="350000"/>
           </a:xfrm>
           <a:prstGeom prst="rect">
             <a:avLst/>
@@ -8690,42 +10332,42 @@
           <a:noFill/>
         </p:spPr>
         <p:txBody>
-          <a:bodyPr wrap="square" anchor="ctr">
+          <a:bodyPr wrap="square" anchor="t">
             <a:spAutoFit/>
           </a:bodyPr>
           <a:lstStyle/>
           <a:p>
             <a:pPr algn="l"/>
             <a:r>
-              <a:rPr sz="3000" b="1">
-                <a:solidFill>
-                  <a:srgbClr val="333333"/>
-                </a:solidFill>
-                <a:latin typeface="Open Sans"/>
-                <a:ea typeface="Open Sans"/>
-                <a:cs typeface="Open Sans"/>
-              </a:rPr>
-              <a:t>БЛАГОДАРИМ ЗА ВНИМАНИЕ</a:t>
-            </a:r>
-          </a:p>
-        </p:txBody>
-      </p:sp>
-      <p:sp>
-        <p:nvSpPr>
-          <p:cNvPr id="5" name="Rectangle 4"/>
+              <a:rPr sz="1200" b="0">
+                <a:solidFill>
+                  <a:srgbClr val="666666"/>
+                </a:solidFill>
+                <a:latin typeface="Open Sans"/>
+                <a:ea typeface="Open Sans"/>
+                <a:cs typeface="Open Sans"/>
+              </a:rPr>
+              <a:t>Оказание первой помощи при травмах, ранениях и поражениях, прочих состояниях</a:t>
+            </a:r>
+          </a:p>
+        </p:txBody>
+      </p:sp>
+      <p:sp>
+        <p:nvSpPr>
+          <p:cNvPr id="6" name="Rectangle 5"/>
           <p:cNvSpPr/>
           <p:nvPr/>
         </p:nvSpPr>
         <p:spPr>
           <a:xfrm>
-            <a:off x="4000000" y="4100000"/>
-            <a:ext cx="4500000" cy="30000"/>
+            <a:off x="0" y="2800000"/>
+            <a:ext cx="420000" cy="420000"/>
           </a:xfrm>
           <a:prstGeom prst="rect">
             <a:avLst/>
           </a:prstGeom>
           <a:solidFill>
-            <a:srgbClr val="333333"/>
+            <a:srgbClr val="555555"/>
           </a:solidFill>
           <a:ln>
             <a:noFill/>
@@ -8750,6 +10392,174 @@
           <a:lstStyle/>
           <a:p>
             <a:pPr algn="ctr"/>
+          </a:p>
+        </p:txBody>
+      </p:sp>
+      <p:sp>
+        <p:nvSpPr>
+          <p:cNvPr id="7" name="TextBox 6"/>
+          <p:cNvSpPr txBox="1"/>
+          <p:nvPr/>
+        </p:nvSpPr>
+        <p:spPr>
+          <a:xfrm>
+            <a:off x="0" y="2800000"/>
+            <a:ext cx="420000" cy="420000"/>
+          </a:xfrm>
+          <a:prstGeom prst="rect">
+            <a:avLst/>
+          </a:prstGeom>
+          <a:noFill/>
+        </p:spPr>
+        <p:txBody>
+          <a:bodyPr wrap="square" anchor="ctr">
+            <a:spAutoFit/>
+          </a:bodyPr>
+          <a:lstStyle/>
+          <a:p>
+            <a:pPr algn="ctr"/>
+            <a:r>
+              <a:rPr sz="1400" b="1">
+                <a:solidFill>
+                  <a:srgbClr val="FFFFFF"/>
+                </a:solidFill>
+                <a:latin typeface="Open Sans"/>
+                <a:ea typeface="Open Sans"/>
+                <a:cs typeface="Open Sans"/>
+              </a:rPr>
+              <a:t>9</a:t>
+            </a:r>
+          </a:p>
+        </p:txBody>
+      </p:sp>
+      <p:sp>
+        <p:nvSpPr>
+          <p:cNvPr id="8" name="TextBox 7"/>
+          <p:cNvSpPr txBox="1"/>
+          <p:nvPr/>
+        </p:nvSpPr>
+        <p:spPr>
+          <a:xfrm>
+            <a:off x="700000" y="1450000"/>
+            <a:ext cx="11000000" cy="4000000"/>
+          </a:xfrm>
+          <a:prstGeom prst="rect">
+            <a:avLst/>
+          </a:prstGeom>
+          <a:noFill/>
+        </p:spPr>
+        <p:txBody>
+          <a:bodyPr wrap="square">
+            <a:spAutoFit/>
+          </a:bodyPr>
+          <a:lstStyle/>
+          <a:p>
+            <a:pPr algn="l">
+              <a:spcAft>
+                <a:spcPts val="800"/>
+              </a:spcAft>
+            </a:pPr>
+            <a:r>
+              <a:rPr sz="1400" b="0">
+                <a:solidFill>
+                  <a:srgbClr val="333333"/>
+                </a:solidFill>
+                <a:latin typeface="Open Sans"/>
+                <a:ea typeface="Open Sans"/>
+                <a:cs typeface="Open Sans"/>
+              </a:rPr>
+              <a:t>•  Говорите по порядку, не скрывая важные детали.</a:t>
+            </a:r>
+          </a:p>
+          <a:p>
+            <a:pPr algn="l">
+              <a:spcAft>
+                <a:spcPts val="800"/>
+              </a:spcAft>
+            </a:pPr>
+            <a:r>
+              <a:rPr sz="1400" b="0">
+                <a:solidFill>
+                  <a:srgbClr val="333333"/>
+                </a:solidFill>
+                <a:latin typeface="Open Sans"/>
+                <a:ea typeface="Open Sans"/>
+                <a:cs typeface="Open Sans"/>
+              </a:rPr>
+              <a:t>•  Отделяйте наблюдаемые факты от собственных предположений.</a:t>
+            </a:r>
+          </a:p>
+          <a:p>
+            <a:pPr algn="l">
+              <a:spcAft>
+                <a:spcPts val="800"/>
+              </a:spcAft>
+            </a:pPr>
+            <a:r>
+              <a:rPr sz="1400" b="0">
+                <a:solidFill>
+                  <a:srgbClr val="333333"/>
+                </a:solidFill>
+                <a:latin typeface="Open Sans"/>
+                <a:ea typeface="Open Sans"/>
+                <a:cs typeface="Open Sans"/>
+              </a:rPr>
+              <a:t>•  Если чего-то не знаете или не помните, прямо скажите об этом.</a:t>
+            </a:r>
+          </a:p>
+          <a:p>
+            <a:pPr algn="l">
+              <a:spcAft>
+                <a:spcPts val="800"/>
+              </a:spcAft>
+            </a:pPr>
+            <a:r>
+              <a:rPr sz="1400" b="0">
+                <a:solidFill>
+                  <a:srgbClr val="333333"/>
+                </a:solidFill>
+                <a:latin typeface="Open Sans"/>
+                <a:ea typeface="Open Sans"/>
+                <a:cs typeface="Open Sans"/>
+              </a:rPr>
+              <a:t>•  Покажите упаковки химикатов, лекарств и записанное время.</a:t>
+            </a:r>
+          </a:p>
+          <a:p>
+            <a:pPr algn="l">
+              <a:spcAft>
+                <a:spcPts val="800"/>
+              </a:spcAft>
+            </a:pPr>
+            <a:r>
+              <a:rPr sz="1400" b="0">
+                <a:solidFill>
+                  <a:srgbClr val="333333"/>
+                </a:solidFill>
+                <a:latin typeface="Open Sans"/>
+                <a:ea typeface="Open Sans"/>
+                <a:cs typeface="Open Sans"/>
+              </a:rPr>
+              <a:t>•  Сообщите известные заболевания, аллергии и контакты близких.</a:t>
+            </a:r>
+          </a:p>
+          <a:p>
+            <a:pPr algn="l">
+              <a:spcAft>
+                <a:spcPts val="800"/>
+              </a:spcAft>
+            </a:pPr>
+            <a:r>
+              <a:rPr sz="1400" b="0">
+                <a:solidFill>
+                  <a:srgbClr val="333333"/>
+                </a:solidFill>
+                <a:latin typeface="Open Sans"/>
+                <a:ea typeface="Open Sans"/>
+                <a:cs typeface="Open Sans"/>
+              </a:rPr>
+              <a:t>•  После доклада оставайтесь доступным для уточняющих вопросов.</a:t>
+            </a:r>
           </a:p>
         </p:txBody>
       </p:sp>
